--- a/신뢰구간 임용고시 2004.pptx
+++ b/신뢰구간 임용고시 2004.pptx
@@ -10,20 +10,20 @@
     <p:sldId id="257" r:id="rId4"/>
     <p:sldId id="276" r:id="rId5"/>
     <p:sldId id="277" r:id="rId6"/>
-    <p:sldId id="269" r:id="rId7"/>
-    <p:sldId id="283" r:id="rId8"/>
-    <p:sldId id="284" r:id="rId9"/>
-    <p:sldId id="285" r:id="rId10"/>
-    <p:sldId id="286" r:id="rId11"/>
-    <p:sldId id="287" r:id="rId12"/>
-    <p:sldId id="288" r:id="rId13"/>
-    <p:sldId id="278" r:id="rId14"/>
-    <p:sldId id="289" r:id="rId15"/>
-    <p:sldId id="290" r:id="rId16"/>
-    <p:sldId id="291" r:id="rId17"/>
-    <p:sldId id="292" r:id="rId18"/>
-    <p:sldId id="293" r:id="rId19"/>
-    <p:sldId id="294" r:id="rId20"/>
+    <p:sldId id="300" r:id="rId7"/>
+    <p:sldId id="288" r:id="rId8"/>
+    <p:sldId id="299" r:id="rId9"/>
+    <p:sldId id="298" r:id="rId10"/>
+    <p:sldId id="297" r:id="rId11"/>
+    <p:sldId id="296" r:id="rId12"/>
+    <p:sldId id="295" r:id="rId13"/>
+    <p:sldId id="308" r:id="rId14"/>
+    <p:sldId id="307" r:id="rId15"/>
+    <p:sldId id="304" r:id="rId16"/>
+    <p:sldId id="306" r:id="rId17"/>
+    <p:sldId id="305" r:id="rId18"/>
+    <p:sldId id="303" r:id="rId19"/>
+    <p:sldId id="301" r:id="rId20"/>
   </p:sldIdLst>
   <p:sldSz cx="12192000" cy="6858000"/>
   <p:notesSz cx="6858000" cy="9144000"/>
@@ -172,10 +172,9 @@
           </a:lstStyle>
           <a:p>
             <a:r>
-              <a:rPr lang="en-US" smtClean="0"/>
+              <a:rPr lang="en-US"/>
               <a:t>Click to edit Master title style</a:t>
             </a:r>
-            <a:endParaRPr lang="en-US"/>
           </a:p>
         </p:txBody>
       </p:sp>
@@ -237,10 +236,9 @@
           </a:lstStyle>
           <a:p>
             <a:r>
-              <a:rPr lang="en-US" smtClean="0"/>
+              <a:rPr lang="en-US"/>
               <a:t>Click to edit Master subtitle style</a:t>
             </a:r>
-            <a:endParaRPr lang="en-US"/>
           </a:p>
         </p:txBody>
       </p:sp>
@@ -261,7 +259,7 @@
           <a:p>
             <a:fld id="{5B3AD1D6-AE87-C841-B3FD-7C9F7FCAE5AE}" type="datetimeFigureOut">
               <a:rPr lang="en-US" smtClean="0"/>
-              <a:t>12/15/19</a:t>
+              <a:t>12/22/19</a:t>
             </a:fld>
             <a:endParaRPr lang="en-US"/>
           </a:p>
@@ -355,10 +353,9 @@
           <a:lstStyle/>
           <a:p>
             <a:r>
-              <a:rPr lang="en-US" smtClean="0"/>
+              <a:rPr lang="en-US"/>
               <a:t>Click to edit Master title style</a:t>
             </a:r>
-            <a:endParaRPr lang="en-US"/>
           </a:p>
         </p:txBody>
       </p:sp>
@@ -379,38 +376,37 @@
           <a:p>
             <a:pPr lvl="0"/>
             <a:r>
-              <a:rPr lang="en-US" smtClean="0"/>
+              <a:rPr lang="en-US"/>
               <a:t>Click to edit Master text styles</a:t>
             </a:r>
           </a:p>
           <a:p>
             <a:pPr lvl="1"/>
             <a:r>
-              <a:rPr lang="en-US" smtClean="0"/>
+              <a:rPr lang="en-US"/>
               <a:t>Second level</a:t>
             </a:r>
           </a:p>
           <a:p>
             <a:pPr lvl="2"/>
             <a:r>
-              <a:rPr lang="en-US" smtClean="0"/>
+              <a:rPr lang="en-US"/>
               <a:t>Third level</a:t>
             </a:r>
           </a:p>
           <a:p>
             <a:pPr lvl="3"/>
             <a:r>
-              <a:rPr lang="en-US" smtClean="0"/>
+              <a:rPr lang="en-US"/>
               <a:t>Fourth level</a:t>
             </a:r>
           </a:p>
           <a:p>
             <a:pPr lvl="4"/>
             <a:r>
-              <a:rPr lang="en-US" smtClean="0"/>
+              <a:rPr lang="en-US"/>
               <a:t>Fifth level</a:t>
             </a:r>
-            <a:endParaRPr lang="en-US"/>
           </a:p>
         </p:txBody>
       </p:sp>
@@ -431,7 +427,7 @@
           <a:p>
             <a:fld id="{5B3AD1D6-AE87-C841-B3FD-7C9F7FCAE5AE}" type="datetimeFigureOut">
               <a:rPr lang="en-US" smtClean="0"/>
-              <a:t>12/15/19</a:t>
+              <a:t>12/22/19</a:t>
             </a:fld>
             <a:endParaRPr lang="en-US"/>
           </a:p>
@@ -530,10 +526,9 @@
           <a:lstStyle/>
           <a:p>
             <a:r>
-              <a:rPr lang="en-US" smtClean="0"/>
+              <a:rPr lang="en-US"/>
               <a:t>Click to edit Master title style</a:t>
             </a:r>
-            <a:endParaRPr lang="en-US"/>
           </a:p>
         </p:txBody>
       </p:sp>
@@ -559,38 +554,37 @@
           <a:p>
             <a:pPr lvl="0"/>
             <a:r>
-              <a:rPr lang="en-US" smtClean="0"/>
+              <a:rPr lang="en-US"/>
               <a:t>Click to edit Master text styles</a:t>
             </a:r>
           </a:p>
           <a:p>
             <a:pPr lvl="1"/>
             <a:r>
-              <a:rPr lang="en-US" smtClean="0"/>
+              <a:rPr lang="en-US"/>
               <a:t>Second level</a:t>
             </a:r>
           </a:p>
           <a:p>
             <a:pPr lvl="2"/>
             <a:r>
-              <a:rPr lang="en-US" smtClean="0"/>
+              <a:rPr lang="en-US"/>
               <a:t>Third level</a:t>
             </a:r>
           </a:p>
           <a:p>
             <a:pPr lvl="3"/>
             <a:r>
-              <a:rPr lang="en-US" smtClean="0"/>
+              <a:rPr lang="en-US"/>
               <a:t>Fourth level</a:t>
             </a:r>
           </a:p>
           <a:p>
             <a:pPr lvl="4"/>
             <a:r>
-              <a:rPr lang="en-US" smtClean="0"/>
+              <a:rPr lang="en-US"/>
               <a:t>Fifth level</a:t>
             </a:r>
-            <a:endParaRPr lang="en-US"/>
           </a:p>
         </p:txBody>
       </p:sp>
@@ -611,7 +605,7 @@
           <a:p>
             <a:fld id="{5B3AD1D6-AE87-C841-B3FD-7C9F7FCAE5AE}" type="datetimeFigureOut">
               <a:rPr lang="en-US" smtClean="0"/>
-              <a:t>12/15/19</a:t>
+              <a:t>12/22/19</a:t>
             </a:fld>
             <a:endParaRPr lang="en-US"/>
           </a:p>
@@ -705,10 +699,9 @@
           <a:lstStyle/>
           <a:p>
             <a:r>
-              <a:rPr lang="en-US" smtClean="0"/>
+              <a:rPr lang="en-US"/>
               <a:t>Click to edit Master title style</a:t>
             </a:r>
-            <a:endParaRPr lang="en-US"/>
           </a:p>
         </p:txBody>
       </p:sp>
@@ -729,38 +722,37 @@
           <a:p>
             <a:pPr lvl="0"/>
             <a:r>
-              <a:rPr lang="en-US" smtClean="0"/>
+              <a:rPr lang="en-US"/>
               <a:t>Click to edit Master text styles</a:t>
             </a:r>
           </a:p>
           <a:p>
             <a:pPr lvl="1"/>
             <a:r>
-              <a:rPr lang="en-US" smtClean="0"/>
+              <a:rPr lang="en-US"/>
               <a:t>Second level</a:t>
             </a:r>
           </a:p>
           <a:p>
             <a:pPr lvl="2"/>
             <a:r>
-              <a:rPr lang="en-US" smtClean="0"/>
+              <a:rPr lang="en-US"/>
               <a:t>Third level</a:t>
             </a:r>
           </a:p>
           <a:p>
             <a:pPr lvl="3"/>
             <a:r>
-              <a:rPr lang="en-US" smtClean="0"/>
+              <a:rPr lang="en-US"/>
               <a:t>Fourth level</a:t>
             </a:r>
           </a:p>
           <a:p>
             <a:pPr lvl="4"/>
             <a:r>
-              <a:rPr lang="en-US" smtClean="0"/>
+              <a:rPr lang="en-US"/>
               <a:t>Fifth level</a:t>
             </a:r>
-            <a:endParaRPr lang="en-US"/>
           </a:p>
         </p:txBody>
       </p:sp>
@@ -781,7 +773,7 @@
           <a:p>
             <a:fld id="{5B3AD1D6-AE87-C841-B3FD-7C9F7FCAE5AE}" type="datetimeFigureOut">
               <a:rPr lang="en-US" smtClean="0"/>
-              <a:t>12/15/19</a:t>
+              <a:t>12/22/19</a:t>
             </a:fld>
             <a:endParaRPr lang="en-US"/>
           </a:p>
@@ -884,10 +876,9 @@
           </a:lstStyle>
           <a:p>
             <a:r>
-              <a:rPr lang="en-US" smtClean="0"/>
+              <a:rPr lang="en-US"/>
               <a:t>Click to edit Master title style</a:t>
             </a:r>
-            <a:endParaRPr lang="en-US"/>
           </a:p>
         </p:txBody>
       </p:sp>
@@ -1004,7 +995,7 @@
           <a:p>
             <a:pPr lvl="0"/>
             <a:r>
-              <a:rPr lang="en-US" smtClean="0"/>
+              <a:rPr lang="en-US"/>
               <a:t>Click to edit Master text styles</a:t>
             </a:r>
           </a:p>
@@ -1027,7 +1018,7 @@
           <a:p>
             <a:fld id="{5B3AD1D6-AE87-C841-B3FD-7C9F7FCAE5AE}" type="datetimeFigureOut">
               <a:rPr lang="en-US" smtClean="0"/>
-              <a:t>12/15/19</a:t>
+              <a:t>12/22/19</a:t>
             </a:fld>
             <a:endParaRPr lang="en-US"/>
           </a:p>
@@ -1121,10 +1112,9 @@
           <a:lstStyle/>
           <a:p>
             <a:r>
-              <a:rPr lang="en-US" smtClean="0"/>
+              <a:rPr lang="en-US"/>
               <a:t>Click to edit Master title style</a:t>
             </a:r>
-            <a:endParaRPr lang="en-US"/>
           </a:p>
         </p:txBody>
       </p:sp>
@@ -1150,38 +1140,37 @@
           <a:p>
             <a:pPr lvl="0"/>
             <a:r>
-              <a:rPr lang="en-US" smtClean="0"/>
+              <a:rPr lang="en-US"/>
               <a:t>Click to edit Master text styles</a:t>
             </a:r>
           </a:p>
           <a:p>
             <a:pPr lvl="1"/>
             <a:r>
-              <a:rPr lang="en-US" smtClean="0"/>
+              <a:rPr lang="en-US"/>
               <a:t>Second level</a:t>
             </a:r>
           </a:p>
           <a:p>
             <a:pPr lvl="2"/>
             <a:r>
-              <a:rPr lang="en-US" smtClean="0"/>
+              <a:rPr lang="en-US"/>
               <a:t>Third level</a:t>
             </a:r>
           </a:p>
           <a:p>
             <a:pPr lvl="3"/>
             <a:r>
-              <a:rPr lang="en-US" smtClean="0"/>
+              <a:rPr lang="en-US"/>
               <a:t>Fourth level</a:t>
             </a:r>
           </a:p>
           <a:p>
             <a:pPr lvl="4"/>
             <a:r>
-              <a:rPr lang="en-US" smtClean="0"/>
+              <a:rPr lang="en-US"/>
               <a:t>Fifth level</a:t>
             </a:r>
-            <a:endParaRPr lang="en-US"/>
           </a:p>
         </p:txBody>
       </p:sp>
@@ -1207,38 +1196,37 @@
           <a:p>
             <a:pPr lvl="0"/>
             <a:r>
-              <a:rPr lang="en-US" smtClean="0"/>
+              <a:rPr lang="en-US"/>
               <a:t>Click to edit Master text styles</a:t>
             </a:r>
           </a:p>
           <a:p>
             <a:pPr lvl="1"/>
             <a:r>
-              <a:rPr lang="en-US" smtClean="0"/>
+              <a:rPr lang="en-US"/>
               <a:t>Second level</a:t>
             </a:r>
           </a:p>
           <a:p>
             <a:pPr lvl="2"/>
             <a:r>
-              <a:rPr lang="en-US" smtClean="0"/>
+              <a:rPr lang="en-US"/>
               <a:t>Third level</a:t>
             </a:r>
           </a:p>
           <a:p>
             <a:pPr lvl="3"/>
             <a:r>
-              <a:rPr lang="en-US" smtClean="0"/>
+              <a:rPr lang="en-US"/>
               <a:t>Fourth level</a:t>
             </a:r>
           </a:p>
           <a:p>
             <a:pPr lvl="4"/>
             <a:r>
-              <a:rPr lang="en-US" smtClean="0"/>
+              <a:rPr lang="en-US"/>
               <a:t>Fifth level</a:t>
             </a:r>
-            <a:endParaRPr lang="en-US"/>
           </a:p>
         </p:txBody>
       </p:sp>
@@ -1259,7 +1247,7 @@
           <a:p>
             <a:fld id="{5B3AD1D6-AE87-C841-B3FD-7C9F7FCAE5AE}" type="datetimeFigureOut">
               <a:rPr lang="en-US" smtClean="0"/>
-              <a:t>12/15/19</a:t>
+              <a:t>12/22/19</a:t>
             </a:fld>
             <a:endParaRPr lang="en-US"/>
           </a:p>
@@ -1358,10 +1346,9 @@
           <a:lstStyle/>
           <a:p>
             <a:r>
-              <a:rPr lang="en-US" smtClean="0"/>
+              <a:rPr lang="en-US"/>
               <a:t>Click to edit Master title style</a:t>
             </a:r>
-            <a:endParaRPr lang="en-US"/>
           </a:p>
         </p:txBody>
       </p:sp>
@@ -1424,7 +1411,7 @@
           <a:p>
             <a:pPr lvl="0"/>
             <a:r>
-              <a:rPr lang="en-US" smtClean="0"/>
+              <a:rPr lang="en-US"/>
               <a:t>Click to edit Master text styles</a:t>
             </a:r>
           </a:p>
@@ -1452,38 +1439,37 @@
           <a:p>
             <a:pPr lvl="0"/>
             <a:r>
-              <a:rPr lang="en-US" smtClean="0"/>
+              <a:rPr lang="en-US"/>
               <a:t>Click to edit Master text styles</a:t>
             </a:r>
           </a:p>
           <a:p>
             <a:pPr lvl="1"/>
             <a:r>
-              <a:rPr lang="en-US" smtClean="0"/>
+              <a:rPr lang="en-US"/>
               <a:t>Second level</a:t>
             </a:r>
           </a:p>
           <a:p>
             <a:pPr lvl="2"/>
             <a:r>
-              <a:rPr lang="en-US" smtClean="0"/>
+              <a:rPr lang="en-US"/>
               <a:t>Third level</a:t>
             </a:r>
           </a:p>
           <a:p>
             <a:pPr lvl="3"/>
             <a:r>
-              <a:rPr lang="en-US" smtClean="0"/>
+              <a:rPr lang="en-US"/>
               <a:t>Fourth level</a:t>
             </a:r>
           </a:p>
           <a:p>
             <a:pPr lvl="4"/>
             <a:r>
-              <a:rPr lang="en-US" smtClean="0"/>
+              <a:rPr lang="en-US"/>
               <a:t>Fifth level</a:t>
             </a:r>
-            <a:endParaRPr lang="en-US"/>
           </a:p>
         </p:txBody>
       </p:sp>
@@ -1546,7 +1532,7 @@
           <a:p>
             <a:pPr lvl="0"/>
             <a:r>
-              <a:rPr lang="en-US" smtClean="0"/>
+              <a:rPr lang="en-US"/>
               <a:t>Click to edit Master text styles</a:t>
             </a:r>
           </a:p>
@@ -1574,38 +1560,37 @@
           <a:p>
             <a:pPr lvl="0"/>
             <a:r>
-              <a:rPr lang="en-US" smtClean="0"/>
+              <a:rPr lang="en-US"/>
               <a:t>Click to edit Master text styles</a:t>
             </a:r>
           </a:p>
           <a:p>
             <a:pPr lvl="1"/>
             <a:r>
-              <a:rPr lang="en-US" smtClean="0"/>
+              <a:rPr lang="en-US"/>
               <a:t>Second level</a:t>
             </a:r>
           </a:p>
           <a:p>
             <a:pPr lvl="2"/>
             <a:r>
-              <a:rPr lang="en-US" smtClean="0"/>
+              <a:rPr lang="en-US"/>
               <a:t>Third level</a:t>
             </a:r>
           </a:p>
           <a:p>
             <a:pPr lvl="3"/>
             <a:r>
-              <a:rPr lang="en-US" smtClean="0"/>
+              <a:rPr lang="en-US"/>
               <a:t>Fourth level</a:t>
             </a:r>
           </a:p>
           <a:p>
             <a:pPr lvl="4"/>
             <a:r>
-              <a:rPr lang="en-US" smtClean="0"/>
+              <a:rPr lang="en-US"/>
               <a:t>Fifth level</a:t>
             </a:r>
-            <a:endParaRPr lang="en-US"/>
           </a:p>
         </p:txBody>
       </p:sp>
@@ -1626,7 +1611,7 @@
           <a:p>
             <a:fld id="{5B3AD1D6-AE87-C841-B3FD-7C9F7FCAE5AE}" type="datetimeFigureOut">
               <a:rPr lang="en-US" smtClean="0"/>
-              <a:t>12/15/19</a:t>
+              <a:t>12/22/19</a:t>
             </a:fld>
             <a:endParaRPr lang="en-US"/>
           </a:p>
@@ -1720,10 +1705,9 @@
           <a:lstStyle/>
           <a:p>
             <a:r>
-              <a:rPr lang="en-US" smtClean="0"/>
+              <a:rPr lang="en-US"/>
               <a:t>Click to edit Master title style</a:t>
             </a:r>
-            <a:endParaRPr lang="en-US"/>
           </a:p>
         </p:txBody>
       </p:sp>
@@ -1744,7 +1728,7 @@
           <a:p>
             <a:fld id="{5B3AD1D6-AE87-C841-B3FD-7C9F7FCAE5AE}" type="datetimeFigureOut">
               <a:rPr lang="en-US" smtClean="0"/>
-              <a:t>12/15/19</a:t>
+              <a:t>12/22/19</a:t>
             </a:fld>
             <a:endParaRPr lang="en-US"/>
           </a:p>
@@ -1839,7 +1823,7 @@
           <a:p>
             <a:fld id="{5B3AD1D6-AE87-C841-B3FD-7C9F7FCAE5AE}" type="datetimeFigureOut">
               <a:rPr lang="en-US" smtClean="0"/>
-              <a:t>12/15/19</a:t>
+              <a:t>12/22/19</a:t>
             </a:fld>
             <a:endParaRPr lang="en-US"/>
           </a:p>
@@ -1942,10 +1926,9 @@
           </a:lstStyle>
           <a:p>
             <a:r>
-              <a:rPr lang="en-US" smtClean="0"/>
+              <a:rPr lang="en-US"/>
               <a:t>Click to edit Master title style</a:t>
             </a:r>
-            <a:endParaRPr lang="en-US"/>
           </a:p>
         </p:txBody>
       </p:sp>
@@ -1999,38 +1982,37 @@
           <a:p>
             <a:pPr lvl="0"/>
             <a:r>
-              <a:rPr lang="en-US" smtClean="0"/>
+              <a:rPr lang="en-US"/>
               <a:t>Click to edit Master text styles</a:t>
             </a:r>
           </a:p>
           <a:p>
             <a:pPr lvl="1"/>
             <a:r>
-              <a:rPr lang="en-US" smtClean="0"/>
+              <a:rPr lang="en-US"/>
               <a:t>Second level</a:t>
             </a:r>
           </a:p>
           <a:p>
             <a:pPr lvl="2"/>
             <a:r>
-              <a:rPr lang="en-US" smtClean="0"/>
+              <a:rPr lang="en-US"/>
               <a:t>Third level</a:t>
             </a:r>
           </a:p>
           <a:p>
             <a:pPr lvl="3"/>
             <a:r>
-              <a:rPr lang="en-US" smtClean="0"/>
+              <a:rPr lang="en-US"/>
               <a:t>Fourth level</a:t>
             </a:r>
           </a:p>
           <a:p>
             <a:pPr lvl="4"/>
             <a:r>
-              <a:rPr lang="en-US" smtClean="0"/>
+              <a:rPr lang="en-US"/>
               <a:t>Fifth level</a:t>
             </a:r>
-            <a:endParaRPr lang="en-US"/>
           </a:p>
         </p:txBody>
       </p:sp>
@@ -2093,7 +2075,7 @@
           <a:p>
             <a:pPr lvl="0"/>
             <a:r>
-              <a:rPr lang="en-US" smtClean="0"/>
+              <a:rPr lang="en-US"/>
               <a:t>Click to edit Master text styles</a:t>
             </a:r>
           </a:p>
@@ -2116,7 +2098,7 @@
           <a:p>
             <a:fld id="{5B3AD1D6-AE87-C841-B3FD-7C9F7FCAE5AE}" type="datetimeFigureOut">
               <a:rPr lang="en-US" smtClean="0"/>
-              <a:t>12/15/19</a:t>
+              <a:t>12/22/19</a:t>
             </a:fld>
             <a:endParaRPr lang="en-US"/>
           </a:p>
@@ -2219,10 +2201,9 @@
           </a:lstStyle>
           <a:p>
             <a:r>
-              <a:rPr lang="en-US" smtClean="0"/>
+              <a:rPr lang="en-US"/>
               <a:t>Click to edit Master title style</a:t>
             </a:r>
-            <a:endParaRPr lang="en-US"/>
           </a:p>
         </p:txBody>
       </p:sp>
@@ -2346,7 +2327,7 @@
           <a:p>
             <a:pPr lvl="0"/>
             <a:r>
-              <a:rPr lang="en-US" smtClean="0"/>
+              <a:rPr lang="en-US"/>
               <a:t>Click to edit Master text styles</a:t>
             </a:r>
           </a:p>
@@ -2369,7 +2350,7 @@
           <a:p>
             <a:fld id="{5B3AD1D6-AE87-C841-B3FD-7C9F7FCAE5AE}" type="datetimeFigureOut">
               <a:rPr lang="en-US" smtClean="0"/>
-              <a:t>12/15/19</a:t>
+              <a:t>12/22/19</a:t>
             </a:fld>
             <a:endParaRPr lang="en-US"/>
           </a:p>
@@ -2478,10 +2459,9 @@
           <a:lstStyle/>
           <a:p>
             <a:r>
-              <a:rPr lang="en-US" smtClean="0"/>
+              <a:rPr lang="en-US"/>
               <a:t>Click to edit Master title style</a:t>
             </a:r>
-            <a:endParaRPr lang="en-US"/>
           </a:p>
         </p:txBody>
       </p:sp>
@@ -2512,38 +2492,37 @@
           <a:p>
             <a:pPr lvl="0"/>
             <a:r>
-              <a:rPr lang="en-US" smtClean="0"/>
+              <a:rPr lang="en-US"/>
               <a:t>Click to edit Master text styles</a:t>
             </a:r>
           </a:p>
           <a:p>
             <a:pPr lvl="1"/>
             <a:r>
-              <a:rPr lang="en-US" smtClean="0"/>
+              <a:rPr lang="en-US"/>
               <a:t>Second level</a:t>
             </a:r>
           </a:p>
           <a:p>
             <a:pPr lvl="2"/>
             <a:r>
-              <a:rPr lang="en-US" smtClean="0"/>
+              <a:rPr lang="en-US"/>
               <a:t>Third level</a:t>
             </a:r>
           </a:p>
           <a:p>
             <a:pPr lvl="3"/>
             <a:r>
-              <a:rPr lang="en-US" smtClean="0"/>
+              <a:rPr lang="en-US"/>
               <a:t>Fourth level</a:t>
             </a:r>
           </a:p>
           <a:p>
             <a:pPr lvl="4"/>
             <a:r>
-              <a:rPr lang="en-US" smtClean="0"/>
+              <a:rPr lang="en-US"/>
               <a:t>Fifth level</a:t>
             </a:r>
-            <a:endParaRPr lang="en-US"/>
           </a:p>
         </p:txBody>
       </p:sp>
@@ -2582,7 +2561,7 @@
           <a:p>
             <a:fld id="{5B3AD1D6-AE87-C841-B3FD-7C9F7FCAE5AE}" type="datetimeFigureOut">
               <a:rPr lang="en-US" smtClean="0"/>
-              <a:t>12/15/19</a:t>
+              <a:t>12/22/19</a:t>
             </a:fld>
             <a:endParaRPr lang="en-US"/>
           </a:p>
@@ -3009,29 +2988,6 @@
           </a:bodyPr>
           <a:lstStyle/>
           <a:p>
-            <a:r>
-              <a:rPr lang="en-US" sz="4000" dirty="0" smtClean="0">
-                <a:latin typeface="Arial Black" charset="0"/>
-                <a:ea typeface="Arial Black" charset="0"/>
-                <a:cs typeface="Arial Black" charset="0"/>
-              </a:rPr>
-              <a:t/>
-            </a:r>
-            <a:br>
-              <a:rPr lang="en-US" sz="4000" dirty="0" smtClean="0">
-                <a:latin typeface="Arial Black" charset="0"/>
-                <a:ea typeface="Arial Black" charset="0"/>
-                <a:cs typeface="Arial Black" charset="0"/>
-              </a:rPr>
-            </a:br>
-            <a:r>
-              <a:rPr lang="en-US" sz="4000" dirty="0">
-                <a:latin typeface="Arial Black" charset="0"/>
-                <a:ea typeface="Arial Black" charset="0"/>
-                <a:cs typeface="Arial Black" charset="0"/>
-              </a:rPr>
-              <a:t/>
-            </a:r>
             <a:br>
               <a:rPr lang="en-US" sz="4000" dirty="0">
                 <a:latin typeface="Arial Black" charset="0"/>
@@ -3039,29 +2995,6 @@
                 <a:cs typeface="Arial Black" charset="0"/>
               </a:rPr>
             </a:br>
-            <a:r>
-              <a:rPr lang="en-US" sz="4000" dirty="0" smtClean="0">
-                <a:latin typeface="Arial Black" charset="0"/>
-                <a:ea typeface="Arial Black" charset="0"/>
-                <a:cs typeface="Arial Black" charset="0"/>
-              </a:rPr>
-              <a:t/>
-            </a:r>
-            <a:br>
-              <a:rPr lang="en-US" sz="4000" dirty="0" smtClean="0">
-                <a:latin typeface="Arial Black" charset="0"/>
-                <a:ea typeface="Arial Black" charset="0"/>
-                <a:cs typeface="Arial Black" charset="0"/>
-              </a:rPr>
-            </a:br>
-            <a:r>
-              <a:rPr lang="en-US" sz="4000" dirty="0">
-                <a:latin typeface="Arial Black" charset="0"/>
-                <a:ea typeface="Arial Black" charset="0"/>
-                <a:cs typeface="Arial Black" charset="0"/>
-              </a:rPr>
-              <a:t/>
-            </a:r>
             <a:br>
               <a:rPr lang="en-US" sz="4000" dirty="0">
                 <a:latin typeface="Arial Black" charset="0"/>
@@ -3069,29 +3002,6 @@
                 <a:cs typeface="Arial Black" charset="0"/>
               </a:rPr>
             </a:br>
-            <a:r>
-              <a:rPr lang="en-US" sz="4000" dirty="0" smtClean="0">
-                <a:latin typeface="Arial Black" charset="0"/>
-                <a:ea typeface="Arial Black" charset="0"/>
-                <a:cs typeface="Arial Black" charset="0"/>
-              </a:rPr>
-              <a:t/>
-            </a:r>
-            <a:br>
-              <a:rPr lang="en-US" sz="4000" dirty="0" smtClean="0">
-                <a:latin typeface="Arial Black" charset="0"/>
-                <a:ea typeface="Arial Black" charset="0"/>
-                <a:cs typeface="Arial Black" charset="0"/>
-              </a:rPr>
-            </a:br>
-            <a:r>
-              <a:rPr lang="en-US" sz="4000" dirty="0">
-                <a:latin typeface="Arial Black" charset="0"/>
-                <a:ea typeface="Arial Black" charset="0"/>
-                <a:cs typeface="Arial Black" charset="0"/>
-              </a:rPr>
-              <a:t/>
-            </a:r>
             <a:br>
               <a:rPr lang="en-US" sz="4000" dirty="0">
                 <a:latin typeface="Arial Black" charset="0"/>
@@ -3099,29 +3009,6 @@
                 <a:cs typeface="Arial Black" charset="0"/>
               </a:rPr>
             </a:br>
-            <a:r>
-              <a:rPr lang="en-US" sz="4000" dirty="0" smtClean="0">
-                <a:latin typeface="Arial Black" charset="0"/>
-                <a:ea typeface="Arial Black" charset="0"/>
-                <a:cs typeface="Arial Black" charset="0"/>
-              </a:rPr>
-              <a:t/>
-            </a:r>
-            <a:br>
-              <a:rPr lang="en-US" sz="4000" dirty="0" smtClean="0">
-                <a:latin typeface="Arial Black" charset="0"/>
-                <a:ea typeface="Arial Black" charset="0"/>
-                <a:cs typeface="Arial Black" charset="0"/>
-              </a:rPr>
-            </a:br>
-            <a:r>
-              <a:rPr lang="en-US" sz="4000" dirty="0">
-                <a:latin typeface="Arial Black" charset="0"/>
-                <a:ea typeface="Arial Black" charset="0"/>
-                <a:cs typeface="Arial Black" charset="0"/>
-              </a:rPr>
-              <a:t/>
-            </a:r>
             <a:br>
               <a:rPr lang="en-US" sz="4000" dirty="0">
                 <a:latin typeface="Arial Black" charset="0"/>
@@ -3129,29 +3016,6 @@
                 <a:cs typeface="Arial Black" charset="0"/>
               </a:rPr>
             </a:br>
-            <a:r>
-              <a:rPr lang="en-US" sz="4000" dirty="0" smtClean="0">
-                <a:latin typeface="Arial Black" charset="0"/>
-                <a:ea typeface="Arial Black" charset="0"/>
-                <a:cs typeface="Arial Black" charset="0"/>
-              </a:rPr>
-              <a:t/>
-            </a:r>
-            <a:br>
-              <a:rPr lang="en-US" sz="4000" dirty="0" smtClean="0">
-                <a:latin typeface="Arial Black" charset="0"/>
-                <a:ea typeface="Arial Black" charset="0"/>
-                <a:cs typeface="Arial Black" charset="0"/>
-              </a:rPr>
-            </a:br>
-            <a:r>
-              <a:rPr lang="en-US" sz="4000" dirty="0">
-                <a:latin typeface="Arial Black" charset="0"/>
-                <a:ea typeface="Arial Black" charset="0"/>
-                <a:cs typeface="Arial Black" charset="0"/>
-              </a:rPr>
-              <a:t/>
-            </a:r>
             <a:br>
               <a:rPr lang="en-US" sz="4000" dirty="0">
                 <a:latin typeface="Arial Black" charset="0"/>
@@ -3159,23 +3023,50 @@
                 <a:cs typeface="Arial Black" charset="0"/>
               </a:rPr>
             </a:br>
-            <a:r>
-              <a:rPr lang="en-US" sz="4000" dirty="0" smtClean="0">
-                <a:latin typeface="Arial Black" charset="0"/>
-                <a:ea typeface="Arial Black" charset="0"/>
-                <a:cs typeface="Arial Black" charset="0"/>
-              </a:rPr>
-              <a:t/>
-            </a:r>
             <a:br>
-              <a:rPr lang="en-US" sz="4000" dirty="0" smtClean="0">
+              <a:rPr lang="en-US" sz="4000" dirty="0">
                 <a:latin typeface="Arial Black" charset="0"/>
                 <a:ea typeface="Arial Black" charset="0"/>
                 <a:cs typeface="Arial Black" charset="0"/>
               </a:rPr>
             </a:br>
-            <a:r>
-              <a:rPr lang="en-US" sz="6700" dirty="0" smtClean="0">
+            <a:br>
+              <a:rPr lang="en-US" sz="4000" dirty="0">
+                <a:latin typeface="Arial Black" charset="0"/>
+                <a:ea typeface="Arial Black" charset="0"/>
+                <a:cs typeface="Arial Black" charset="0"/>
+              </a:rPr>
+            </a:br>
+            <a:br>
+              <a:rPr lang="en-US" sz="4000" dirty="0">
+                <a:latin typeface="Arial Black" charset="0"/>
+                <a:ea typeface="Arial Black" charset="0"/>
+                <a:cs typeface="Arial Black" charset="0"/>
+              </a:rPr>
+            </a:br>
+            <a:br>
+              <a:rPr lang="en-US" sz="4000" dirty="0">
+                <a:latin typeface="Arial Black" charset="0"/>
+                <a:ea typeface="Arial Black" charset="0"/>
+                <a:cs typeface="Arial Black" charset="0"/>
+              </a:rPr>
+            </a:br>
+            <a:br>
+              <a:rPr lang="en-US" sz="4000" dirty="0">
+                <a:latin typeface="Arial Black" charset="0"/>
+                <a:ea typeface="Arial Black" charset="0"/>
+                <a:cs typeface="Arial Black" charset="0"/>
+              </a:rPr>
+            </a:br>
+            <a:br>
+              <a:rPr lang="en-US" sz="4000" dirty="0">
+                <a:latin typeface="Arial Black" charset="0"/>
+                <a:ea typeface="Arial Black" charset="0"/>
+                <a:cs typeface="Arial Black" charset="0"/>
+              </a:rPr>
+            </a:br>
+            <a:r>
+              <a:rPr lang="en-US" sz="6700" dirty="0">
                 <a:latin typeface="Arial Black" charset="0"/>
                 <a:ea typeface="Arial Black" charset="0"/>
                 <a:cs typeface="Arial Black" charset="0"/>
@@ -3183,14 +3074,14 @@
               <a:t>Problems</a:t>
             </a:r>
             <a:br>
-              <a:rPr lang="en-US" sz="6700" dirty="0" smtClean="0">
+              <a:rPr lang="en-US" sz="6700" dirty="0">
                 <a:latin typeface="Arial Black" charset="0"/>
                 <a:ea typeface="Arial Black" charset="0"/>
                 <a:cs typeface="Arial Black" charset="0"/>
               </a:rPr>
             </a:br>
             <a:r>
-              <a:rPr lang="en-US" sz="6700" dirty="0" smtClean="0">
+              <a:rPr lang="en-US" sz="6700" dirty="0">
                 <a:latin typeface="Arial Black" charset="0"/>
                 <a:ea typeface="Arial Black" charset="0"/>
                 <a:cs typeface="Arial Black" charset="0"/>
@@ -3198,14 +3089,14 @@
               <a:t>on</a:t>
             </a:r>
             <a:br>
-              <a:rPr lang="en-US" sz="6700" dirty="0" smtClean="0">
+              <a:rPr lang="en-US" sz="6700" dirty="0">
                 <a:latin typeface="Arial Black" charset="0"/>
                 <a:ea typeface="Arial Black" charset="0"/>
                 <a:cs typeface="Arial Black" charset="0"/>
               </a:rPr>
             </a:br>
             <a:r>
-              <a:rPr lang="en-US" sz="6700" dirty="0" smtClean="0">
+              <a:rPr lang="en-US" sz="6700" dirty="0">
                 <a:latin typeface="Arial Black" charset="0"/>
                 <a:ea typeface="Arial Black" charset="0"/>
                 <a:cs typeface="Arial Black" charset="0"/>
@@ -3213,22 +3104,22 @@
               <a:t>Confidence Interval</a:t>
             </a:r>
             <a:br>
-              <a:rPr lang="en-US" sz="6700" dirty="0" smtClean="0">
+              <a:rPr lang="en-US" sz="6700" dirty="0">
                 <a:latin typeface="Arial Black" charset="0"/>
                 <a:ea typeface="Arial Black" charset="0"/>
                 <a:cs typeface="Arial Black" charset="0"/>
               </a:rPr>
             </a:br>
             <a:r>
-              <a:rPr lang="en-US" sz="6700" dirty="0" smtClean="0">
+              <a:rPr lang="en-US" altLang="ko-KR" sz="6700" dirty="0">
                 <a:latin typeface="Arial Black" charset="0"/>
                 <a:ea typeface="Arial Black" charset="0"/>
                 <a:cs typeface="Arial Black" charset="0"/>
               </a:rPr>
-              <a:t/>
+              <a:t>2004</a:t>
             </a:r>
             <a:br>
-              <a:rPr lang="en-US" sz="6700" dirty="0" smtClean="0">
+              <a:rPr lang="en-US" sz="6700" dirty="0">
                 <a:latin typeface="Arial Black" charset="0"/>
                 <a:ea typeface="Arial Black" charset="0"/>
                 <a:cs typeface="Arial Black" charset="0"/>
@@ -3307,21 +3198,44 @@
           <p:nvPr/>
         </p:nvPicPr>
         <p:blipFill>
-          <a:blip r:embed="rId2">
+          <a:blip r:embed="rId2"/>
+          <a:srcRect/>
+          <a:stretch/>
+        </p:blipFill>
+        <p:spPr>
+          <a:xfrm>
+            <a:off x="3913090" y="2794000"/>
+            <a:ext cx="4091499" cy="3390900"/>
+          </a:xfrm>
+          <a:prstGeom prst="rect">
+            <a:avLst/>
+          </a:prstGeom>
+        </p:spPr>
+      </p:pic>
+      <p:pic>
+        <p:nvPicPr>
+          <p:cNvPr id="4" name="Picture 3" descr="A close up of a logo&#10;&#10;Description automatically generated">
             <a:extLst>
-              <a:ext uri="{28A0092B-C50C-407E-A947-70E740481C1C}">
-                <a14:useLocalDpi xmlns:a14="http://schemas.microsoft.com/office/drawing/2010/main" val="0"/>
+              <a:ext uri="{FF2B5EF4-FFF2-40B4-BE49-F238E27FC236}">
+                <a16:creationId xmlns:a16="http://schemas.microsoft.com/office/drawing/2014/main" id="{A52F8928-AA7A-2540-BE54-B7428C3A08D3}"/>
               </a:ext>
             </a:extLst>
-          </a:blip>
+          </p:cNvPr>
+          <p:cNvPicPr>
+            <a:picLocks noChangeAspect="1"/>
+          </p:cNvPicPr>
+          <p:nvPr/>
+        </p:nvPicPr>
+        <p:blipFill>
+          <a:blip r:embed="rId3"/>
           <a:stretch>
             <a:fillRect/>
           </a:stretch>
         </p:blipFill>
         <p:spPr>
           <a:xfrm>
-            <a:off x="3888740" y="2794000"/>
-            <a:ext cx="4140200" cy="3390900"/>
+            <a:off x="1025610" y="5402580"/>
+            <a:ext cx="10700951" cy="1066800"/>
           </a:xfrm>
           <a:prstGeom prst="rect">
             <a:avLst/>
@@ -3330,37 +3244,13 @@
       </p:pic>
       <p:pic>
         <p:nvPicPr>
-          <p:cNvPr id="4" name="Picture 3"/>
-          <p:cNvPicPr>
-            <a:picLocks noChangeAspect="1"/>
-          </p:cNvPicPr>
-          <p:nvPr/>
-        </p:nvPicPr>
-        <p:blipFill>
-          <a:blip r:embed="rId3">
+          <p:cNvPr id="7" name="Picture 6">
             <a:extLst>
-              <a:ext uri="{28A0092B-C50C-407E-A947-70E740481C1C}">
-                <a14:useLocalDpi xmlns:a14="http://schemas.microsoft.com/office/drawing/2010/main" val="0"/>
+              <a:ext uri="{FF2B5EF4-FFF2-40B4-BE49-F238E27FC236}">
+                <a16:creationId xmlns:a16="http://schemas.microsoft.com/office/drawing/2014/main" id="{87F6C640-BCDA-8E48-AF18-DEE15B120D44}"/>
               </a:ext>
             </a:extLst>
-          </a:blip>
-          <a:stretch>
-            <a:fillRect/>
-          </a:stretch>
-        </p:blipFill>
-        <p:spPr>
-          <a:xfrm>
-            <a:off x="3888740" y="5227320"/>
-            <a:ext cx="4325620" cy="957580"/>
-          </a:xfrm>
-          <a:prstGeom prst="rect">
-            <a:avLst/>
-          </a:prstGeom>
-        </p:spPr>
-      </p:pic>
-      <p:pic>
-        <p:nvPicPr>
-          <p:cNvPr id="5" name="Picture 4"/>
+          </p:cNvPr>
           <p:cNvPicPr>
             <a:picLocks noChangeAspect="1"/>
           </p:cNvPicPr>
@@ -3391,7 +3281,7 @@
     </p:spTree>
     <p:extLst>
       <p:ext uri="{BB962C8B-B14F-4D97-AF65-F5344CB8AC3E}">
-        <p14:creationId xmlns:p14="http://schemas.microsoft.com/office/powerpoint/2010/main" val="720604496"/>
+        <p14:creationId xmlns:p14="http://schemas.microsoft.com/office/powerpoint/2010/main" val="444699915"/>
       </p:ext>
     </p:extLst>
   </p:cSld>
@@ -3427,21 +3317,14 @@
           <p:nvPr/>
         </p:nvPicPr>
         <p:blipFill>
-          <a:blip r:embed="rId2">
-            <a:extLst>
-              <a:ext uri="{28A0092B-C50C-407E-A947-70E740481C1C}">
-                <a14:useLocalDpi xmlns:a14="http://schemas.microsoft.com/office/drawing/2010/main" val="0"/>
-              </a:ext>
-            </a:extLst>
-          </a:blip>
-          <a:stretch>
-            <a:fillRect/>
-          </a:stretch>
+          <a:blip r:embed="rId2"/>
+          <a:srcRect/>
+          <a:stretch/>
         </p:blipFill>
         <p:spPr>
           <a:xfrm>
-            <a:off x="3888740" y="2794000"/>
-            <a:ext cx="4140200" cy="3390900"/>
+            <a:off x="3913090" y="2794000"/>
+            <a:ext cx="4091499" cy="3390900"/>
           </a:xfrm>
           <a:prstGeom prst="rect">
             <a:avLst/>
@@ -3450,7 +3333,7 @@
       </p:pic>
       <p:pic>
         <p:nvPicPr>
-          <p:cNvPr id="4" name="Picture 3"/>
+          <p:cNvPr id="6" name="Picture 5"/>
           <p:cNvPicPr>
             <a:picLocks noChangeAspect="1"/>
           </p:cNvPicPr>
@@ -3470,8 +3353,8 @@
         </p:blipFill>
         <p:spPr>
           <a:xfrm>
-            <a:off x="3888740" y="5227320"/>
-            <a:ext cx="4325620" cy="957580"/>
+            <a:off x="1852478" y="388620"/>
+            <a:ext cx="8212723" cy="2019300"/>
           </a:xfrm>
           <a:prstGeom prst="rect">
             <a:avLst/>
@@ -3480,28 +3363,28 @@
       </p:pic>
       <p:pic>
         <p:nvPicPr>
-          <p:cNvPr id="6" name="Picture 5"/>
+          <p:cNvPr id="4" name="Picture 3" descr="A close up of a logo&#10;&#10;Description automatically generated">
+            <a:extLst>
+              <a:ext uri="{FF2B5EF4-FFF2-40B4-BE49-F238E27FC236}">
+                <a16:creationId xmlns:a16="http://schemas.microsoft.com/office/drawing/2014/main" id="{A52F8928-AA7A-2540-BE54-B7428C3A08D3}"/>
+              </a:ext>
+            </a:extLst>
+          </p:cNvPr>
           <p:cNvPicPr>
             <a:picLocks noChangeAspect="1"/>
           </p:cNvPicPr>
           <p:nvPr/>
         </p:nvPicPr>
         <p:blipFill>
-          <a:blip r:embed="rId4">
-            <a:extLst>
-              <a:ext uri="{28A0092B-C50C-407E-A947-70E740481C1C}">
-                <a14:useLocalDpi xmlns:a14="http://schemas.microsoft.com/office/drawing/2010/main" val="0"/>
-              </a:ext>
-            </a:extLst>
-          </a:blip>
+          <a:blip r:embed="rId4"/>
           <a:stretch>
             <a:fillRect/>
           </a:stretch>
         </p:blipFill>
         <p:spPr>
           <a:xfrm>
-            <a:off x="1852478" y="388620"/>
-            <a:ext cx="8212723" cy="2019300"/>
+            <a:off x="1025610" y="5402580"/>
+            <a:ext cx="10700951" cy="1066800"/>
           </a:xfrm>
           <a:prstGeom prst="rect">
             <a:avLst/>
@@ -3511,7 +3394,7 @@
     </p:spTree>
     <p:extLst>
       <p:ext uri="{BB962C8B-B14F-4D97-AF65-F5344CB8AC3E}">
-        <p14:creationId xmlns:p14="http://schemas.microsoft.com/office/powerpoint/2010/main" val="1667554665"/>
+        <p14:creationId xmlns:p14="http://schemas.microsoft.com/office/powerpoint/2010/main" val="733131261"/>
       </p:ext>
     </p:extLst>
   </p:cSld>
@@ -3547,21 +3430,14 @@
           <p:nvPr/>
         </p:nvPicPr>
         <p:blipFill>
-          <a:blip r:embed="rId2">
-            <a:extLst>
-              <a:ext uri="{28A0092B-C50C-407E-A947-70E740481C1C}">
-                <a14:useLocalDpi xmlns:a14="http://schemas.microsoft.com/office/drawing/2010/main" val="0"/>
-              </a:ext>
-            </a:extLst>
-          </a:blip>
-          <a:stretch>
-            <a:fillRect/>
-          </a:stretch>
+          <a:blip r:embed="rId2"/>
+          <a:srcRect/>
+          <a:stretch/>
         </p:blipFill>
         <p:spPr>
           <a:xfrm>
-            <a:off x="3888740" y="2794000"/>
-            <a:ext cx="4140200" cy="3390900"/>
+            <a:off x="3913090" y="2794000"/>
+            <a:ext cx="4091499" cy="3390900"/>
           </a:xfrm>
           <a:prstGeom prst="rect">
             <a:avLst/>
@@ -3598,10 +3474,70 @@
           </a:prstGeom>
         </p:spPr>
       </p:pic>
+      <p:pic>
+        <p:nvPicPr>
+          <p:cNvPr id="3" name="Picture 2">
+            <a:extLst>
+              <a:ext uri="{FF2B5EF4-FFF2-40B4-BE49-F238E27FC236}">
+                <a16:creationId xmlns:a16="http://schemas.microsoft.com/office/drawing/2014/main" id="{F6B8D4CE-169F-6245-99AB-8DF27C0F4F5E}"/>
+              </a:ext>
+            </a:extLst>
+          </p:cNvPr>
+          <p:cNvPicPr>
+            <a:picLocks noChangeAspect="1"/>
+          </p:cNvPicPr>
+          <p:nvPr/>
+        </p:nvPicPr>
+        <p:blipFill>
+          <a:blip r:embed="rId4"/>
+          <a:stretch>
+            <a:fillRect/>
+          </a:stretch>
+        </p:blipFill>
+        <p:spPr>
+          <a:xfrm>
+            <a:off x="0" y="0"/>
+            <a:ext cx="12192000" cy="6858000"/>
+          </a:xfrm>
+          <a:prstGeom prst="rect">
+            <a:avLst/>
+          </a:prstGeom>
+        </p:spPr>
+      </p:pic>
+      <p:pic>
+        <p:nvPicPr>
+          <p:cNvPr id="4" name="Picture 3">
+            <a:extLst>
+              <a:ext uri="{FF2B5EF4-FFF2-40B4-BE49-F238E27FC236}">
+                <a16:creationId xmlns:a16="http://schemas.microsoft.com/office/drawing/2014/main" id="{A95B9288-8C20-DB43-BC9C-D99D47C34A18}"/>
+              </a:ext>
+            </a:extLst>
+          </p:cNvPr>
+          <p:cNvPicPr>
+            <a:picLocks noChangeAspect="1"/>
+          </p:cNvPicPr>
+          <p:nvPr/>
+        </p:nvPicPr>
+        <p:blipFill>
+          <a:blip r:embed="rId4"/>
+          <a:stretch>
+            <a:fillRect/>
+          </a:stretch>
+        </p:blipFill>
+        <p:spPr>
+          <a:xfrm>
+            <a:off x="0" y="0"/>
+            <a:ext cx="12192000" cy="6858000"/>
+          </a:xfrm>
+          <a:prstGeom prst="rect">
+            <a:avLst/>
+          </a:prstGeom>
+        </p:spPr>
+      </p:pic>
     </p:spTree>
     <p:extLst>
       <p:ext uri="{BB962C8B-B14F-4D97-AF65-F5344CB8AC3E}">
-        <p14:creationId xmlns:p14="http://schemas.microsoft.com/office/powerpoint/2010/main" val="420603983"/>
+        <p14:creationId xmlns:p14="http://schemas.microsoft.com/office/powerpoint/2010/main" val="1306141750"/>
       </p:ext>
     </p:extLst>
   </p:cSld>
@@ -3630,28 +3566,21 @@
       </p:grpSpPr>
       <p:pic>
         <p:nvPicPr>
-          <p:cNvPr id="2" name="Picture 1"/>
+          <p:cNvPr id="3" name="Picture 2"/>
           <p:cNvPicPr>
             <a:picLocks noChangeAspect="1"/>
           </p:cNvPicPr>
           <p:nvPr/>
         </p:nvPicPr>
         <p:blipFill>
-          <a:blip r:embed="rId2">
-            <a:extLst>
-              <a:ext uri="{28A0092B-C50C-407E-A947-70E740481C1C}">
-                <a14:useLocalDpi xmlns:a14="http://schemas.microsoft.com/office/drawing/2010/main" val="0"/>
-              </a:ext>
-            </a:extLst>
-          </a:blip>
-          <a:stretch>
-            <a:fillRect/>
-          </a:stretch>
+          <a:blip r:embed="rId2"/>
+          <a:srcRect/>
+          <a:stretch/>
         </p:blipFill>
         <p:spPr>
           <a:xfrm>
-            <a:off x="2179320" y="411480"/>
-            <a:ext cx="7620000" cy="2438400"/>
+            <a:off x="4001770" y="3215596"/>
+            <a:ext cx="3975100" cy="3340188"/>
           </a:xfrm>
           <a:prstGeom prst="rect">
             <a:avLst/>
@@ -3660,7 +3589,7 @@
       </p:pic>
       <p:pic>
         <p:nvPicPr>
-          <p:cNvPr id="3" name="Picture 2"/>
+          <p:cNvPr id="6" name="Picture 5"/>
           <p:cNvPicPr>
             <a:picLocks noChangeAspect="1"/>
           </p:cNvPicPr>
@@ -3680,8 +3609,8 @@
         </p:blipFill>
         <p:spPr>
           <a:xfrm>
-            <a:off x="4001770" y="3177540"/>
-            <a:ext cx="3975100" cy="3416300"/>
+            <a:off x="2179320" y="411480"/>
+            <a:ext cx="7620000" cy="2438400"/>
           </a:xfrm>
           <a:prstGeom prst="rect">
             <a:avLst/>
@@ -3690,14 +3619,110 @@
       </p:pic>
       <p:pic>
         <p:nvPicPr>
-          <p:cNvPr id="4" name="Picture 3"/>
+          <p:cNvPr id="2" name="Picture 1">
+            <a:extLst>
+              <a:ext uri="{FF2B5EF4-FFF2-40B4-BE49-F238E27FC236}">
+                <a16:creationId xmlns:a16="http://schemas.microsoft.com/office/drawing/2014/main" id="{FD589184-3A08-7640-A014-4498788510B4}"/>
+              </a:ext>
+            </a:extLst>
+          </p:cNvPr>
           <p:cNvPicPr>
             <a:picLocks noChangeAspect="1"/>
           </p:cNvPicPr>
           <p:nvPr/>
         </p:nvPicPr>
         <p:blipFill>
-          <a:blip r:embed="rId4">
+          <a:blip r:embed="rId4"/>
+          <a:stretch>
+            <a:fillRect/>
+          </a:stretch>
+        </p:blipFill>
+        <p:spPr>
+          <a:xfrm>
+            <a:off x="0" y="0"/>
+            <a:ext cx="12192000" cy="6858000"/>
+          </a:xfrm>
+          <a:prstGeom prst="rect">
+            <a:avLst/>
+          </a:prstGeom>
+        </p:spPr>
+      </p:pic>
+      <p:pic>
+        <p:nvPicPr>
+          <p:cNvPr id="5" name="Picture 4" descr="A close up of a logo&#10;&#10;Description automatically generated">
+            <a:extLst>
+              <a:ext uri="{FF2B5EF4-FFF2-40B4-BE49-F238E27FC236}">
+                <a16:creationId xmlns:a16="http://schemas.microsoft.com/office/drawing/2014/main" id="{96E02C08-0660-C143-BB62-CFAF2F8230B1}"/>
+              </a:ext>
+            </a:extLst>
+          </p:cNvPr>
+          <p:cNvPicPr>
+            <a:picLocks noChangeAspect="1"/>
+          </p:cNvPicPr>
+          <p:nvPr/>
+        </p:nvPicPr>
+        <p:blipFill>
+          <a:blip r:embed="rId5"/>
+          <a:stretch>
+            <a:fillRect/>
+          </a:stretch>
+        </p:blipFill>
+        <p:spPr>
+          <a:xfrm>
+            <a:off x="290456" y="3202827"/>
+            <a:ext cx="11715078" cy="3352957"/>
+          </a:xfrm>
+          <a:prstGeom prst="rect">
+            <a:avLst/>
+          </a:prstGeom>
+        </p:spPr>
+      </p:pic>
+      <p:pic>
+        <p:nvPicPr>
+          <p:cNvPr id="7" name="Picture 6" descr="A close up of a logo&#10;&#10;Description automatically generated">
+            <a:extLst>
+              <a:ext uri="{FF2B5EF4-FFF2-40B4-BE49-F238E27FC236}">
+                <a16:creationId xmlns:a16="http://schemas.microsoft.com/office/drawing/2014/main" id="{6423E810-EE3D-5648-82BF-192B36D706CD}"/>
+              </a:ext>
+            </a:extLst>
+          </p:cNvPr>
+          <p:cNvPicPr>
+            <a:picLocks noChangeAspect="1"/>
+          </p:cNvPicPr>
+          <p:nvPr/>
+        </p:nvPicPr>
+        <p:blipFill>
+          <a:blip r:embed="rId5"/>
+          <a:stretch>
+            <a:fillRect/>
+          </a:stretch>
+        </p:blipFill>
+        <p:spPr>
+          <a:xfrm>
+            <a:off x="1609089" y="302216"/>
+            <a:ext cx="9091861" cy="2712833"/>
+          </a:xfrm>
+          <a:prstGeom prst="rect">
+            <a:avLst/>
+          </a:prstGeom>
+        </p:spPr>
+      </p:pic>
+      <p:pic>
+        <p:nvPicPr>
+          <p:cNvPr id="9" name="Picture 8">
+            <a:extLst>
+              <a:ext uri="{FF2B5EF4-FFF2-40B4-BE49-F238E27FC236}">
+                <a16:creationId xmlns:a16="http://schemas.microsoft.com/office/drawing/2014/main" id="{4478DA56-F8DE-364F-8EF1-5467CD70619C}"/>
+              </a:ext>
+            </a:extLst>
+          </p:cNvPr>
+          <p:cNvPicPr>
+            <a:picLocks noChangeAspect="1"/>
+          </p:cNvPicPr>
+          <p:nvPr/>
+        </p:nvPicPr>
+        <p:blipFill>
+          <a:blip r:embed="rId3">
             <a:extLst>
               <a:ext uri="{28A0092B-C50C-407E-A947-70E740481C1C}">
                 <a14:useLocalDpi xmlns:a14="http://schemas.microsoft.com/office/drawing/2010/main" val="0"/>
@@ -3710,8 +3735,8 @@
         </p:blipFill>
         <p:spPr>
           <a:xfrm>
-            <a:off x="4001770" y="3149600"/>
-            <a:ext cx="4380230" cy="3444240"/>
+            <a:off x="2331720" y="563880"/>
+            <a:ext cx="7620000" cy="2438400"/>
           </a:xfrm>
           <a:prstGeom prst="rect">
             <a:avLst/>
@@ -3721,7 +3746,7 @@
     </p:spTree>
     <p:extLst>
       <p:ext uri="{BB962C8B-B14F-4D97-AF65-F5344CB8AC3E}">
-        <p14:creationId xmlns:p14="http://schemas.microsoft.com/office/powerpoint/2010/main" val="654785401"/>
+        <p14:creationId xmlns:p14="http://schemas.microsoft.com/office/powerpoint/2010/main" val="1194359586"/>
       </p:ext>
     </p:extLst>
   </p:cSld>
@@ -3750,28 +3775,21 @@
       </p:grpSpPr>
       <p:pic>
         <p:nvPicPr>
-          <p:cNvPr id="2" name="Picture 1"/>
+          <p:cNvPr id="3" name="Picture 2"/>
           <p:cNvPicPr>
             <a:picLocks noChangeAspect="1"/>
           </p:cNvPicPr>
           <p:nvPr/>
         </p:nvPicPr>
         <p:blipFill>
-          <a:blip r:embed="rId2">
-            <a:extLst>
-              <a:ext uri="{28A0092B-C50C-407E-A947-70E740481C1C}">
-                <a14:useLocalDpi xmlns:a14="http://schemas.microsoft.com/office/drawing/2010/main" val="0"/>
-              </a:ext>
-            </a:extLst>
-          </a:blip>
-          <a:stretch>
-            <a:fillRect/>
-          </a:stretch>
+          <a:blip r:embed="rId2"/>
+          <a:srcRect/>
+          <a:stretch/>
         </p:blipFill>
         <p:spPr>
           <a:xfrm>
-            <a:off x="2179320" y="411480"/>
-            <a:ext cx="7620000" cy="2438400"/>
+            <a:off x="4001770" y="3215596"/>
+            <a:ext cx="3975100" cy="3340188"/>
           </a:xfrm>
           <a:prstGeom prst="rect">
             <a:avLst/>
@@ -3780,7 +3798,7 @@
       </p:pic>
       <p:pic>
         <p:nvPicPr>
-          <p:cNvPr id="3" name="Picture 2"/>
+          <p:cNvPr id="6" name="Picture 5"/>
           <p:cNvPicPr>
             <a:picLocks noChangeAspect="1"/>
           </p:cNvPicPr>
@@ -3800,8 +3818,8 @@
         </p:blipFill>
         <p:spPr>
           <a:xfrm>
-            <a:off x="4001770" y="3177540"/>
-            <a:ext cx="3975100" cy="3416300"/>
+            <a:off x="2179320" y="411480"/>
+            <a:ext cx="7620000" cy="2438400"/>
           </a:xfrm>
           <a:prstGeom prst="rect">
             <a:avLst/>
@@ -3810,14 +3828,110 @@
       </p:pic>
       <p:pic>
         <p:nvPicPr>
-          <p:cNvPr id="4" name="Picture 3"/>
+          <p:cNvPr id="2" name="Picture 1">
+            <a:extLst>
+              <a:ext uri="{FF2B5EF4-FFF2-40B4-BE49-F238E27FC236}">
+                <a16:creationId xmlns:a16="http://schemas.microsoft.com/office/drawing/2014/main" id="{FD589184-3A08-7640-A014-4498788510B4}"/>
+              </a:ext>
+            </a:extLst>
+          </p:cNvPr>
           <p:cNvPicPr>
             <a:picLocks noChangeAspect="1"/>
           </p:cNvPicPr>
           <p:nvPr/>
         </p:nvPicPr>
         <p:blipFill>
-          <a:blip r:embed="rId4">
+          <a:blip r:embed="rId4"/>
+          <a:stretch>
+            <a:fillRect/>
+          </a:stretch>
+        </p:blipFill>
+        <p:spPr>
+          <a:xfrm>
+            <a:off x="0" y="0"/>
+            <a:ext cx="12192000" cy="6858000"/>
+          </a:xfrm>
+          <a:prstGeom prst="rect">
+            <a:avLst/>
+          </a:prstGeom>
+        </p:spPr>
+      </p:pic>
+      <p:pic>
+        <p:nvPicPr>
+          <p:cNvPr id="5" name="Picture 4" descr="A close up of a logo&#10;&#10;Description automatically generated">
+            <a:extLst>
+              <a:ext uri="{FF2B5EF4-FFF2-40B4-BE49-F238E27FC236}">
+                <a16:creationId xmlns:a16="http://schemas.microsoft.com/office/drawing/2014/main" id="{96E02C08-0660-C143-BB62-CFAF2F8230B1}"/>
+              </a:ext>
+            </a:extLst>
+          </p:cNvPr>
+          <p:cNvPicPr>
+            <a:picLocks noChangeAspect="1"/>
+          </p:cNvPicPr>
+          <p:nvPr/>
+        </p:nvPicPr>
+        <p:blipFill>
+          <a:blip r:embed="rId5"/>
+          <a:stretch>
+            <a:fillRect/>
+          </a:stretch>
+        </p:blipFill>
+        <p:spPr>
+          <a:xfrm>
+            <a:off x="290456" y="4356847"/>
+            <a:ext cx="11715078" cy="2198937"/>
+          </a:xfrm>
+          <a:prstGeom prst="rect">
+            <a:avLst/>
+          </a:prstGeom>
+        </p:spPr>
+      </p:pic>
+      <p:pic>
+        <p:nvPicPr>
+          <p:cNvPr id="7" name="Picture 6" descr="A close up of a logo&#10;&#10;Description automatically generated">
+            <a:extLst>
+              <a:ext uri="{FF2B5EF4-FFF2-40B4-BE49-F238E27FC236}">
+                <a16:creationId xmlns:a16="http://schemas.microsoft.com/office/drawing/2014/main" id="{6423E810-EE3D-5648-82BF-192B36D706CD}"/>
+              </a:ext>
+            </a:extLst>
+          </p:cNvPr>
+          <p:cNvPicPr>
+            <a:picLocks noChangeAspect="1"/>
+          </p:cNvPicPr>
+          <p:nvPr/>
+        </p:nvPicPr>
+        <p:blipFill>
+          <a:blip r:embed="rId5"/>
+          <a:stretch>
+            <a:fillRect/>
+          </a:stretch>
+        </p:blipFill>
+        <p:spPr>
+          <a:xfrm>
+            <a:off x="1609089" y="302216"/>
+            <a:ext cx="9091861" cy="2712833"/>
+          </a:xfrm>
+          <a:prstGeom prst="rect">
+            <a:avLst/>
+          </a:prstGeom>
+        </p:spPr>
+      </p:pic>
+      <p:pic>
+        <p:nvPicPr>
+          <p:cNvPr id="9" name="Picture 8">
+            <a:extLst>
+              <a:ext uri="{FF2B5EF4-FFF2-40B4-BE49-F238E27FC236}">
+                <a16:creationId xmlns:a16="http://schemas.microsoft.com/office/drawing/2014/main" id="{4478DA56-F8DE-364F-8EF1-5467CD70619C}"/>
+              </a:ext>
+            </a:extLst>
+          </p:cNvPr>
+          <p:cNvPicPr>
+            <a:picLocks noChangeAspect="1"/>
+          </p:cNvPicPr>
+          <p:nvPr/>
+        </p:nvPicPr>
+        <p:blipFill>
+          <a:blip r:embed="rId3">
             <a:extLst>
               <a:ext uri="{28A0092B-C50C-407E-A947-70E740481C1C}">
                 <a14:useLocalDpi xmlns:a14="http://schemas.microsoft.com/office/drawing/2010/main" val="0"/>
@@ -3830,8 +3944,8 @@
         </p:blipFill>
         <p:spPr>
           <a:xfrm>
-            <a:off x="4001770" y="4206240"/>
-            <a:ext cx="4380230" cy="2387600"/>
+            <a:off x="2331720" y="563880"/>
+            <a:ext cx="7620000" cy="2438400"/>
           </a:xfrm>
           <a:prstGeom prst="rect">
             <a:avLst/>
@@ -3841,7 +3955,7 @@
     </p:spTree>
     <p:extLst>
       <p:ext uri="{BB962C8B-B14F-4D97-AF65-F5344CB8AC3E}">
-        <p14:creationId xmlns:p14="http://schemas.microsoft.com/office/powerpoint/2010/main" val="295790674"/>
+        <p14:creationId xmlns:p14="http://schemas.microsoft.com/office/powerpoint/2010/main" val="1537391906"/>
       </p:ext>
     </p:extLst>
   </p:cSld>
@@ -3870,28 +3984,21 @@
       </p:grpSpPr>
       <p:pic>
         <p:nvPicPr>
-          <p:cNvPr id="2" name="Picture 1"/>
+          <p:cNvPr id="3" name="Picture 2"/>
           <p:cNvPicPr>
             <a:picLocks noChangeAspect="1"/>
           </p:cNvPicPr>
           <p:nvPr/>
         </p:nvPicPr>
         <p:blipFill>
-          <a:blip r:embed="rId2">
-            <a:extLst>
-              <a:ext uri="{28A0092B-C50C-407E-A947-70E740481C1C}">
-                <a14:useLocalDpi xmlns:a14="http://schemas.microsoft.com/office/drawing/2010/main" val="0"/>
-              </a:ext>
-            </a:extLst>
-          </a:blip>
-          <a:stretch>
-            <a:fillRect/>
-          </a:stretch>
+          <a:blip r:embed="rId2"/>
+          <a:srcRect/>
+          <a:stretch/>
         </p:blipFill>
         <p:spPr>
           <a:xfrm>
-            <a:off x="2179320" y="411480"/>
-            <a:ext cx="7620000" cy="2438400"/>
+            <a:off x="4001770" y="3215596"/>
+            <a:ext cx="3975100" cy="3340188"/>
           </a:xfrm>
           <a:prstGeom prst="rect">
             <a:avLst/>
@@ -3900,7 +4007,7 @@
       </p:pic>
       <p:pic>
         <p:nvPicPr>
-          <p:cNvPr id="3" name="Picture 2"/>
+          <p:cNvPr id="6" name="Picture 5"/>
           <p:cNvPicPr>
             <a:picLocks noChangeAspect="1"/>
           </p:cNvPicPr>
@@ -3920,8 +4027,8 @@
         </p:blipFill>
         <p:spPr>
           <a:xfrm>
-            <a:off x="4001770" y="3177540"/>
-            <a:ext cx="3975100" cy="3416300"/>
+            <a:off x="2179320" y="411480"/>
+            <a:ext cx="7620000" cy="2438400"/>
           </a:xfrm>
           <a:prstGeom prst="rect">
             <a:avLst/>
@@ -3930,14 +4037,110 @@
       </p:pic>
       <p:pic>
         <p:nvPicPr>
-          <p:cNvPr id="4" name="Picture 3"/>
+          <p:cNvPr id="2" name="Picture 1">
+            <a:extLst>
+              <a:ext uri="{FF2B5EF4-FFF2-40B4-BE49-F238E27FC236}">
+                <a16:creationId xmlns:a16="http://schemas.microsoft.com/office/drawing/2014/main" id="{FD589184-3A08-7640-A014-4498788510B4}"/>
+              </a:ext>
+            </a:extLst>
+          </p:cNvPr>
           <p:cNvPicPr>
             <a:picLocks noChangeAspect="1"/>
           </p:cNvPicPr>
           <p:nvPr/>
         </p:nvPicPr>
         <p:blipFill>
-          <a:blip r:embed="rId4">
+          <a:blip r:embed="rId4"/>
+          <a:stretch>
+            <a:fillRect/>
+          </a:stretch>
+        </p:blipFill>
+        <p:spPr>
+          <a:xfrm>
+            <a:off x="0" y="0"/>
+            <a:ext cx="12192000" cy="6858000"/>
+          </a:xfrm>
+          <a:prstGeom prst="rect">
+            <a:avLst/>
+          </a:prstGeom>
+        </p:spPr>
+      </p:pic>
+      <p:pic>
+        <p:nvPicPr>
+          <p:cNvPr id="5" name="Picture 4" descr="A close up of a logo&#10;&#10;Description automatically generated">
+            <a:extLst>
+              <a:ext uri="{FF2B5EF4-FFF2-40B4-BE49-F238E27FC236}">
+                <a16:creationId xmlns:a16="http://schemas.microsoft.com/office/drawing/2014/main" id="{96E02C08-0660-C143-BB62-CFAF2F8230B1}"/>
+              </a:ext>
+            </a:extLst>
+          </p:cNvPr>
+          <p:cNvPicPr>
+            <a:picLocks noChangeAspect="1"/>
+          </p:cNvPicPr>
+          <p:nvPr/>
+        </p:nvPicPr>
+        <p:blipFill>
+          <a:blip r:embed="rId5"/>
+          <a:stretch>
+            <a:fillRect/>
+          </a:stretch>
+        </p:blipFill>
+        <p:spPr>
+          <a:xfrm>
+            <a:off x="290456" y="4970034"/>
+            <a:ext cx="11715078" cy="1585750"/>
+          </a:xfrm>
+          <a:prstGeom prst="rect">
+            <a:avLst/>
+          </a:prstGeom>
+        </p:spPr>
+      </p:pic>
+      <p:pic>
+        <p:nvPicPr>
+          <p:cNvPr id="7" name="Picture 6" descr="A close up of a logo&#10;&#10;Description automatically generated">
+            <a:extLst>
+              <a:ext uri="{FF2B5EF4-FFF2-40B4-BE49-F238E27FC236}">
+                <a16:creationId xmlns:a16="http://schemas.microsoft.com/office/drawing/2014/main" id="{6423E810-EE3D-5648-82BF-192B36D706CD}"/>
+              </a:ext>
+            </a:extLst>
+          </p:cNvPr>
+          <p:cNvPicPr>
+            <a:picLocks noChangeAspect="1"/>
+          </p:cNvPicPr>
+          <p:nvPr/>
+        </p:nvPicPr>
+        <p:blipFill>
+          <a:blip r:embed="rId5"/>
+          <a:stretch>
+            <a:fillRect/>
+          </a:stretch>
+        </p:blipFill>
+        <p:spPr>
+          <a:xfrm>
+            <a:off x="1609089" y="302216"/>
+            <a:ext cx="9091861" cy="2712833"/>
+          </a:xfrm>
+          <a:prstGeom prst="rect">
+            <a:avLst/>
+          </a:prstGeom>
+        </p:spPr>
+      </p:pic>
+      <p:pic>
+        <p:nvPicPr>
+          <p:cNvPr id="9" name="Picture 8">
+            <a:extLst>
+              <a:ext uri="{FF2B5EF4-FFF2-40B4-BE49-F238E27FC236}">
+                <a16:creationId xmlns:a16="http://schemas.microsoft.com/office/drawing/2014/main" id="{4478DA56-F8DE-364F-8EF1-5467CD70619C}"/>
+              </a:ext>
+            </a:extLst>
+          </p:cNvPr>
+          <p:cNvPicPr>
+            <a:picLocks noChangeAspect="1"/>
+          </p:cNvPicPr>
+          <p:nvPr/>
+        </p:nvPicPr>
+        <p:blipFill>
+          <a:blip r:embed="rId3">
             <a:extLst>
               <a:ext uri="{28A0092B-C50C-407E-A947-70E740481C1C}">
                 <a14:useLocalDpi xmlns:a14="http://schemas.microsoft.com/office/drawing/2010/main" val="0"/>
@@ -3950,8 +4153,8 @@
         </p:blipFill>
         <p:spPr>
           <a:xfrm>
-            <a:off x="4001770" y="5074920"/>
-            <a:ext cx="4380230" cy="1518920"/>
+            <a:off x="2331720" y="563880"/>
+            <a:ext cx="7620000" cy="2438400"/>
           </a:xfrm>
           <a:prstGeom prst="rect">
             <a:avLst/>
@@ -3961,7 +4164,7 @@
     </p:spTree>
     <p:extLst>
       <p:ext uri="{BB962C8B-B14F-4D97-AF65-F5344CB8AC3E}">
-        <p14:creationId xmlns:p14="http://schemas.microsoft.com/office/powerpoint/2010/main" val="5007572"/>
+        <p14:creationId xmlns:p14="http://schemas.microsoft.com/office/powerpoint/2010/main" val="345975306"/>
       </p:ext>
     </p:extLst>
   </p:cSld>
@@ -3997,21 +4200,14 @@
           <p:nvPr/>
         </p:nvPicPr>
         <p:blipFill>
-          <a:blip r:embed="rId2">
-            <a:extLst>
-              <a:ext uri="{28A0092B-C50C-407E-A947-70E740481C1C}">
-                <a14:useLocalDpi xmlns:a14="http://schemas.microsoft.com/office/drawing/2010/main" val="0"/>
-              </a:ext>
-            </a:extLst>
-          </a:blip>
-          <a:stretch>
-            <a:fillRect/>
-          </a:stretch>
+          <a:blip r:embed="rId2"/>
+          <a:srcRect/>
+          <a:stretch/>
         </p:blipFill>
         <p:spPr>
           <a:xfrm>
-            <a:off x="4001770" y="3177540"/>
-            <a:ext cx="3975100" cy="3416300"/>
+            <a:off x="4001770" y="3215596"/>
+            <a:ext cx="3975100" cy="3340188"/>
           </a:xfrm>
           <a:prstGeom prst="rect">
             <a:avLst/>
@@ -4020,7 +4216,7 @@
       </p:pic>
       <p:pic>
         <p:nvPicPr>
-          <p:cNvPr id="4" name="Picture 3"/>
+          <p:cNvPr id="6" name="Picture 5"/>
           <p:cNvPicPr>
             <a:picLocks noChangeAspect="1"/>
           </p:cNvPicPr>
@@ -4040,8 +4236,8 @@
         </p:blipFill>
         <p:spPr>
           <a:xfrm>
-            <a:off x="4001770" y="4983480"/>
-            <a:ext cx="4380230" cy="1610360"/>
+            <a:off x="2179320" y="411480"/>
+            <a:ext cx="7620000" cy="2438400"/>
           </a:xfrm>
           <a:prstGeom prst="rect">
             <a:avLst/>
@@ -4050,14 +4246,110 @@
       </p:pic>
       <p:pic>
         <p:nvPicPr>
-          <p:cNvPr id="5" name="Picture 4"/>
+          <p:cNvPr id="2" name="Picture 1">
+            <a:extLst>
+              <a:ext uri="{FF2B5EF4-FFF2-40B4-BE49-F238E27FC236}">
+                <a16:creationId xmlns:a16="http://schemas.microsoft.com/office/drawing/2014/main" id="{FD589184-3A08-7640-A014-4498788510B4}"/>
+              </a:ext>
+            </a:extLst>
+          </p:cNvPr>
           <p:cNvPicPr>
             <a:picLocks noChangeAspect="1"/>
           </p:cNvPicPr>
           <p:nvPr/>
         </p:nvPicPr>
         <p:blipFill>
-          <a:blip r:embed="rId4">
+          <a:blip r:embed="rId4"/>
+          <a:stretch>
+            <a:fillRect/>
+          </a:stretch>
+        </p:blipFill>
+        <p:spPr>
+          <a:xfrm>
+            <a:off x="0" y="0"/>
+            <a:ext cx="12192000" cy="6858000"/>
+          </a:xfrm>
+          <a:prstGeom prst="rect">
+            <a:avLst/>
+          </a:prstGeom>
+        </p:spPr>
+      </p:pic>
+      <p:pic>
+        <p:nvPicPr>
+          <p:cNvPr id="5" name="Picture 4" descr="A close up of a logo&#10;&#10;Description automatically generated">
+            <a:extLst>
+              <a:ext uri="{FF2B5EF4-FFF2-40B4-BE49-F238E27FC236}">
+                <a16:creationId xmlns:a16="http://schemas.microsoft.com/office/drawing/2014/main" id="{96E02C08-0660-C143-BB62-CFAF2F8230B1}"/>
+              </a:ext>
+            </a:extLst>
+          </p:cNvPr>
+          <p:cNvPicPr>
+            <a:picLocks noChangeAspect="1"/>
+          </p:cNvPicPr>
+          <p:nvPr/>
+        </p:nvPicPr>
+        <p:blipFill>
+          <a:blip r:embed="rId5"/>
+          <a:stretch>
+            <a:fillRect/>
+          </a:stretch>
+        </p:blipFill>
+        <p:spPr>
+          <a:xfrm>
+            <a:off x="290456" y="4970034"/>
+            <a:ext cx="11715078" cy="1585750"/>
+          </a:xfrm>
+          <a:prstGeom prst="rect">
+            <a:avLst/>
+          </a:prstGeom>
+        </p:spPr>
+      </p:pic>
+      <p:pic>
+        <p:nvPicPr>
+          <p:cNvPr id="7" name="Picture 6" descr="A close up of a logo&#10;&#10;Description automatically generated">
+            <a:extLst>
+              <a:ext uri="{FF2B5EF4-FFF2-40B4-BE49-F238E27FC236}">
+                <a16:creationId xmlns:a16="http://schemas.microsoft.com/office/drawing/2014/main" id="{6423E810-EE3D-5648-82BF-192B36D706CD}"/>
+              </a:ext>
+            </a:extLst>
+          </p:cNvPr>
+          <p:cNvPicPr>
+            <a:picLocks noChangeAspect="1"/>
+          </p:cNvPicPr>
+          <p:nvPr/>
+        </p:nvPicPr>
+        <p:blipFill>
+          <a:blip r:embed="rId5"/>
+          <a:stretch>
+            <a:fillRect/>
+          </a:stretch>
+        </p:blipFill>
+        <p:spPr>
+          <a:xfrm>
+            <a:off x="1609089" y="302216"/>
+            <a:ext cx="9091861" cy="2712833"/>
+          </a:xfrm>
+          <a:prstGeom prst="rect">
+            <a:avLst/>
+          </a:prstGeom>
+        </p:spPr>
+      </p:pic>
+      <p:pic>
+        <p:nvPicPr>
+          <p:cNvPr id="8" name="Picture 7">
+            <a:extLst>
+              <a:ext uri="{FF2B5EF4-FFF2-40B4-BE49-F238E27FC236}">
+                <a16:creationId xmlns:a16="http://schemas.microsoft.com/office/drawing/2014/main" id="{AEE4A503-19E2-2448-9204-C07D6FFF82CE}"/>
+              </a:ext>
+            </a:extLst>
+          </p:cNvPr>
+          <p:cNvPicPr>
+            <a:picLocks noChangeAspect="1"/>
+          </p:cNvPicPr>
+          <p:nvPr/>
+        </p:nvPicPr>
+        <p:blipFill>
+          <a:blip r:embed="rId6">
             <a:extLst>
               <a:ext uri="{28A0092B-C50C-407E-A947-70E740481C1C}">
                 <a14:useLocalDpi xmlns:a14="http://schemas.microsoft.com/office/drawing/2010/main" val="0"/>
@@ -4081,7 +4373,7 @@
     </p:spTree>
     <p:extLst>
       <p:ext uri="{BB962C8B-B14F-4D97-AF65-F5344CB8AC3E}">
-        <p14:creationId xmlns:p14="http://schemas.microsoft.com/office/powerpoint/2010/main" val="1866913508"/>
+        <p14:creationId xmlns:p14="http://schemas.microsoft.com/office/powerpoint/2010/main" val="2421706168"/>
       </p:ext>
     </p:extLst>
   </p:cSld>
@@ -4117,21 +4409,14 @@
           <p:nvPr/>
         </p:nvPicPr>
         <p:blipFill>
-          <a:blip r:embed="rId2">
-            <a:extLst>
-              <a:ext uri="{28A0092B-C50C-407E-A947-70E740481C1C}">
-                <a14:useLocalDpi xmlns:a14="http://schemas.microsoft.com/office/drawing/2010/main" val="0"/>
-              </a:ext>
-            </a:extLst>
-          </a:blip>
-          <a:stretch>
-            <a:fillRect/>
-          </a:stretch>
+          <a:blip r:embed="rId2"/>
+          <a:srcRect/>
+          <a:stretch/>
         </p:blipFill>
         <p:spPr>
           <a:xfrm>
-            <a:off x="4001770" y="3177540"/>
-            <a:ext cx="3975100" cy="3416300"/>
+            <a:off x="4001770" y="3215596"/>
+            <a:ext cx="3975100" cy="3340188"/>
           </a:xfrm>
           <a:prstGeom prst="rect">
             <a:avLst/>
@@ -4140,7 +4425,7 @@
       </p:pic>
       <p:pic>
         <p:nvPicPr>
-          <p:cNvPr id="4" name="Picture 3"/>
+          <p:cNvPr id="6" name="Picture 5"/>
           <p:cNvPicPr>
             <a:picLocks noChangeAspect="1"/>
           </p:cNvPicPr>
@@ -4160,8 +4445,8 @@
         </p:blipFill>
         <p:spPr>
           <a:xfrm>
-            <a:off x="4001770" y="5623560"/>
-            <a:ext cx="4380230" cy="970280"/>
+            <a:off x="2179320" y="411480"/>
+            <a:ext cx="7620000" cy="2438400"/>
           </a:xfrm>
           <a:prstGeom prst="rect">
             <a:avLst/>
@@ -4170,14 +4455,110 @@
       </p:pic>
       <p:pic>
         <p:nvPicPr>
-          <p:cNvPr id="5" name="Picture 4"/>
+          <p:cNvPr id="2" name="Picture 1">
+            <a:extLst>
+              <a:ext uri="{FF2B5EF4-FFF2-40B4-BE49-F238E27FC236}">
+                <a16:creationId xmlns:a16="http://schemas.microsoft.com/office/drawing/2014/main" id="{FD589184-3A08-7640-A014-4498788510B4}"/>
+              </a:ext>
+            </a:extLst>
+          </p:cNvPr>
           <p:cNvPicPr>
             <a:picLocks noChangeAspect="1"/>
           </p:cNvPicPr>
           <p:nvPr/>
         </p:nvPicPr>
         <p:blipFill>
-          <a:blip r:embed="rId4">
+          <a:blip r:embed="rId4"/>
+          <a:stretch>
+            <a:fillRect/>
+          </a:stretch>
+        </p:blipFill>
+        <p:spPr>
+          <a:xfrm>
+            <a:off x="0" y="0"/>
+            <a:ext cx="12192000" cy="6858000"/>
+          </a:xfrm>
+          <a:prstGeom prst="rect">
+            <a:avLst/>
+          </a:prstGeom>
+        </p:spPr>
+      </p:pic>
+      <p:pic>
+        <p:nvPicPr>
+          <p:cNvPr id="5" name="Picture 4" descr="A close up of a logo&#10;&#10;Description automatically generated">
+            <a:extLst>
+              <a:ext uri="{FF2B5EF4-FFF2-40B4-BE49-F238E27FC236}">
+                <a16:creationId xmlns:a16="http://schemas.microsoft.com/office/drawing/2014/main" id="{96E02C08-0660-C143-BB62-CFAF2F8230B1}"/>
+              </a:ext>
+            </a:extLst>
+          </p:cNvPr>
+          <p:cNvPicPr>
+            <a:picLocks noChangeAspect="1"/>
+          </p:cNvPicPr>
+          <p:nvPr/>
+        </p:nvPicPr>
+        <p:blipFill>
+          <a:blip r:embed="rId5"/>
+          <a:stretch>
+            <a:fillRect/>
+          </a:stretch>
+        </p:blipFill>
+        <p:spPr>
+          <a:xfrm>
+            <a:off x="290456" y="5701552"/>
+            <a:ext cx="11715078" cy="854231"/>
+          </a:xfrm>
+          <a:prstGeom prst="rect">
+            <a:avLst/>
+          </a:prstGeom>
+        </p:spPr>
+      </p:pic>
+      <p:pic>
+        <p:nvPicPr>
+          <p:cNvPr id="7" name="Picture 6" descr="A close up of a logo&#10;&#10;Description automatically generated">
+            <a:extLst>
+              <a:ext uri="{FF2B5EF4-FFF2-40B4-BE49-F238E27FC236}">
+                <a16:creationId xmlns:a16="http://schemas.microsoft.com/office/drawing/2014/main" id="{6423E810-EE3D-5648-82BF-192B36D706CD}"/>
+              </a:ext>
+            </a:extLst>
+          </p:cNvPr>
+          <p:cNvPicPr>
+            <a:picLocks noChangeAspect="1"/>
+          </p:cNvPicPr>
+          <p:nvPr/>
+        </p:nvPicPr>
+        <p:blipFill>
+          <a:blip r:embed="rId5"/>
+          <a:stretch>
+            <a:fillRect/>
+          </a:stretch>
+        </p:blipFill>
+        <p:spPr>
+          <a:xfrm>
+            <a:off x="1609089" y="302216"/>
+            <a:ext cx="9091861" cy="2712833"/>
+          </a:xfrm>
+          <a:prstGeom prst="rect">
+            <a:avLst/>
+          </a:prstGeom>
+        </p:spPr>
+      </p:pic>
+      <p:pic>
+        <p:nvPicPr>
+          <p:cNvPr id="8" name="Picture 7">
+            <a:extLst>
+              <a:ext uri="{FF2B5EF4-FFF2-40B4-BE49-F238E27FC236}">
+                <a16:creationId xmlns:a16="http://schemas.microsoft.com/office/drawing/2014/main" id="{AEE4A503-19E2-2448-9204-C07D6FFF82CE}"/>
+              </a:ext>
+            </a:extLst>
+          </p:cNvPr>
+          <p:cNvPicPr>
+            <a:picLocks noChangeAspect="1"/>
+          </p:cNvPicPr>
+          <p:nvPr/>
+        </p:nvPicPr>
+        <p:blipFill>
+          <a:blip r:embed="rId6">
             <a:extLst>
               <a:ext uri="{28A0092B-C50C-407E-A947-70E740481C1C}">
                 <a14:useLocalDpi xmlns:a14="http://schemas.microsoft.com/office/drawing/2010/main" val="0"/>
@@ -4201,7 +4582,7 @@
     </p:spTree>
     <p:extLst>
       <p:ext uri="{BB962C8B-B14F-4D97-AF65-F5344CB8AC3E}">
-        <p14:creationId xmlns:p14="http://schemas.microsoft.com/office/powerpoint/2010/main" val="931840393"/>
+        <p14:creationId xmlns:p14="http://schemas.microsoft.com/office/powerpoint/2010/main" val="2468714738"/>
       </p:ext>
     </p:extLst>
   </p:cSld>
@@ -4237,21 +4618,14 @@
           <p:nvPr/>
         </p:nvPicPr>
         <p:blipFill>
-          <a:blip r:embed="rId2">
-            <a:extLst>
-              <a:ext uri="{28A0092B-C50C-407E-A947-70E740481C1C}">
-                <a14:useLocalDpi xmlns:a14="http://schemas.microsoft.com/office/drawing/2010/main" val="0"/>
-              </a:ext>
-            </a:extLst>
-          </a:blip>
-          <a:stretch>
-            <a:fillRect/>
-          </a:stretch>
+          <a:blip r:embed="rId2"/>
+          <a:srcRect/>
+          <a:stretch/>
         </p:blipFill>
         <p:spPr>
           <a:xfrm>
-            <a:off x="4001770" y="3177540"/>
-            <a:ext cx="3975100" cy="3416300"/>
+            <a:off x="4001770" y="3215596"/>
+            <a:ext cx="3975100" cy="3340188"/>
           </a:xfrm>
           <a:prstGeom prst="rect">
             <a:avLst/>
@@ -4260,7 +4634,7 @@
       </p:pic>
       <p:pic>
         <p:nvPicPr>
-          <p:cNvPr id="4" name="Picture 3"/>
+          <p:cNvPr id="6" name="Picture 5"/>
           <p:cNvPicPr>
             <a:picLocks noChangeAspect="1"/>
           </p:cNvPicPr>
@@ -4280,8 +4654,8 @@
         </p:blipFill>
         <p:spPr>
           <a:xfrm>
-            <a:off x="4001770" y="5623560"/>
-            <a:ext cx="4380230" cy="970280"/>
+            <a:off x="2179320" y="411480"/>
+            <a:ext cx="7620000" cy="2438400"/>
           </a:xfrm>
           <a:prstGeom prst="rect">
             <a:avLst/>
@@ -4290,28 +4664,58 @@
       </p:pic>
       <p:pic>
         <p:nvPicPr>
-          <p:cNvPr id="6" name="Picture 5"/>
+          <p:cNvPr id="2" name="Picture 1">
+            <a:extLst>
+              <a:ext uri="{FF2B5EF4-FFF2-40B4-BE49-F238E27FC236}">
+                <a16:creationId xmlns:a16="http://schemas.microsoft.com/office/drawing/2014/main" id="{FD589184-3A08-7640-A014-4498788510B4}"/>
+              </a:ext>
+            </a:extLst>
+          </p:cNvPr>
           <p:cNvPicPr>
             <a:picLocks noChangeAspect="1"/>
           </p:cNvPicPr>
           <p:nvPr/>
         </p:nvPicPr>
         <p:blipFill>
-          <a:blip r:embed="rId4">
-            <a:extLst>
-              <a:ext uri="{28A0092B-C50C-407E-A947-70E740481C1C}">
-                <a14:useLocalDpi xmlns:a14="http://schemas.microsoft.com/office/drawing/2010/main" val="0"/>
-              </a:ext>
-            </a:extLst>
-          </a:blip>
+          <a:blip r:embed="rId4"/>
           <a:stretch>
             <a:fillRect/>
           </a:stretch>
         </p:blipFill>
         <p:spPr>
           <a:xfrm>
-            <a:off x="2179320" y="411480"/>
-            <a:ext cx="7620000" cy="2438400"/>
+            <a:off x="0" y="0"/>
+            <a:ext cx="12192000" cy="6858000"/>
+          </a:xfrm>
+          <a:prstGeom prst="rect">
+            <a:avLst/>
+          </a:prstGeom>
+        </p:spPr>
+      </p:pic>
+      <p:pic>
+        <p:nvPicPr>
+          <p:cNvPr id="5" name="Picture 4" descr="A close up of a logo&#10;&#10;Description automatically generated">
+            <a:extLst>
+              <a:ext uri="{FF2B5EF4-FFF2-40B4-BE49-F238E27FC236}">
+                <a16:creationId xmlns:a16="http://schemas.microsoft.com/office/drawing/2014/main" id="{96E02C08-0660-C143-BB62-CFAF2F8230B1}"/>
+              </a:ext>
+            </a:extLst>
+          </p:cNvPr>
+          <p:cNvPicPr>
+            <a:picLocks noChangeAspect="1"/>
+          </p:cNvPicPr>
+          <p:nvPr/>
+        </p:nvPicPr>
+        <p:blipFill>
+          <a:blip r:embed="rId5"/>
+          <a:stretch>
+            <a:fillRect/>
+          </a:stretch>
+        </p:blipFill>
+        <p:spPr>
+          <a:xfrm>
+            <a:off x="290456" y="5701552"/>
+            <a:ext cx="11715078" cy="854231"/>
           </a:xfrm>
           <a:prstGeom prst="rect">
             <a:avLst/>
@@ -4321,7 +4725,7 @@
     </p:spTree>
     <p:extLst>
       <p:ext uri="{BB962C8B-B14F-4D97-AF65-F5344CB8AC3E}">
-        <p14:creationId xmlns:p14="http://schemas.microsoft.com/office/powerpoint/2010/main" val="833129024"/>
+        <p14:creationId xmlns:p14="http://schemas.microsoft.com/office/powerpoint/2010/main" val="3556365490"/>
       </p:ext>
     </p:extLst>
   </p:cSld>
@@ -4357,21 +4761,14 @@
           <p:nvPr/>
         </p:nvPicPr>
         <p:blipFill>
-          <a:blip r:embed="rId2">
-            <a:extLst>
-              <a:ext uri="{28A0092B-C50C-407E-A947-70E740481C1C}">
-                <a14:useLocalDpi xmlns:a14="http://schemas.microsoft.com/office/drawing/2010/main" val="0"/>
-              </a:ext>
-            </a:extLst>
-          </a:blip>
-          <a:stretch>
-            <a:fillRect/>
-          </a:stretch>
+          <a:blip r:embed="rId2"/>
+          <a:srcRect/>
+          <a:stretch/>
         </p:blipFill>
         <p:spPr>
           <a:xfrm>
-            <a:off x="4001770" y="3177540"/>
-            <a:ext cx="3975100" cy="3416300"/>
+            <a:off x="4001770" y="3215596"/>
+            <a:ext cx="3975100" cy="3340188"/>
           </a:xfrm>
           <a:prstGeom prst="rect">
             <a:avLst/>
@@ -4411,7 +4808,7 @@
     </p:spTree>
     <p:extLst>
       <p:ext uri="{BB962C8B-B14F-4D97-AF65-F5344CB8AC3E}">
-        <p14:creationId xmlns:p14="http://schemas.microsoft.com/office/powerpoint/2010/main" val="506818417"/>
+        <p14:creationId xmlns:p14="http://schemas.microsoft.com/office/powerpoint/2010/main" val="730959811"/>
       </p:ext>
     </p:extLst>
   </p:cSld>
@@ -4456,18 +4853,13 @@
           <a:lstStyle/>
           <a:p>
             <a:r>
-              <a:rPr lang="en-US" sz="4000" dirty="0" smtClean="0">
+              <a:rPr lang="en-US" sz="4000" dirty="0">
                 <a:latin typeface="Arial Black" charset="0"/>
                 <a:ea typeface="Arial Black" charset="0"/>
                 <a:cs typeface="Arial Black" charset="0"/>
               </a:rPr>
               <a:t>Reference</a:t>
             </a:r>
-            <a:endParaRPr lang="en-US" sz="4000" dirty="0">
-              <a:latin typeface="Arial Black" charset="0"/>
-              <a:ea typeface="Arial Black" charset="0"/>
-              <a:cs typeface="Arial Black" charset="0"/>
-            </a:endParaRPr>
           </a:p>
         </p:txBody>
       </p:sp>
@@ -4486,7 +4878,7 @@
           <a:bodyPr/>
           <a:lstStyle/>
           <a:p>
-            <a:endParaRPr lang="en-US" sz="2000" dirty="0" smtClean="0">
+            <a:endParaRPr lang="en-US" sz="2000" dirty="0">
               <a:latin typeface="Arial Black" charset="0"/>
               <a:ea typeface="Arial Black" charset="0"/>
               <a:cs typeface="Arial Black" charset="0"/>
@@ -4495,7 +4887,7 @@
           </a:p>
           <a:p>
             <a:r>
-              <a:rPr lang="en-US" sz="2000" dirty="0" smtClean="0">
+              <a:rPr lang="en-US" sz="2000" dirty="0">
                 <a:latin typeface="Arial Black" charset="0"/>
                 <a:ea typeface="Arial Black" charset="0"/>
                 <a:cs typeface="Arial Black" charset="0"/>
@@ -4503,14 +4895,14 @@
               </a:rPr>
               <a:t>Data</a:t>
             </a:r>
-            <a:endParaRPr lang="en-US" sz="2000" dirty="0" smtClean="0">
+            <a:endParaRPr lang="en-US" sz="2000" dirty="0">
               <a:latin typeface="Arial Black" charset="0"/>
               <a:ea typeface="Arial Black" charset="0"/>
               <a:cs typeface="Arial Black" charset="0"/>
             </a:endParaRPr>
           </a:p>
           <a:p>
-            <a:endParaRPr lang="en-US" sz="2000" dirty="0" smtClean="0">
+            <a:endParaRPr lang="en-US" sz="2000" dirty="0">
               <a:latin typeface="Arial Black" charset="0"/>
               <a:ea typeface="Arial Black" charset="0"/>
               <a:cs typeface="Arial Black" charset="0"/>
@@ -4518,7 +4910,7 @@
           </a:p>
           <a:p>
             <a:r>
-              <a:rPr lang="en-US" sz="2000" dirty="0" smtClean="0">
+              <a:rPr lang="en-US" sz="2000" dirty="0">
                 <a:latin typeface="Arial Black" charset="0"/>
                 <a:ea typeface="Arial Black" charset="0"/>
                 <a:cs typeface="Arial Black" charset="0"/>
@@ -4526,14 +4918,14 @@
               </a:rPr>
               <a:t>Youtube</a:t>
             </a:r>
-            <a:endParaRPr lang="en-US" sz="2000" dirty="0" smtClean="0">
+            <a:endParaRPr lang="en-US" sz="2000" dirty="0">
               <a:latin typeface="Arial Black" charset="0"/>
               <a:ea typeface="Arial Black" charset="0"/>
               <a:cs typeface="Arial Black" charset="0"/>
             </a:endParaRPr>
           </a:p>
           <a:p>
-            <a:endParaRPr lang="en-US" dirty="0" smtClean="0">
+            <a:endParaRPr lang="en-US" dirty="0">
               <a:latin typeface="Arial Black" charset="0"/>
               <a:ea typeface="Arial Black" charset="0"/>
               <a:cs typeface="Arial Black" charset="0"/>
@@ -4541,7 +4933,7 @@
           </a:p>
           <a:p>
             <a:r>
-              <a:rPr lang="en-US" sz="2000" dirty="0" smtClean="0">
+              <a:rPr lang="en-US" sz="2000" dirty="0">
                 <a:latin typeface="Arial Black" charset="0"/>
                 <a:ea typeface="Arial Black" charset="0"/>
                 <a:cs typeface="Arial Black" charset="0"/>
@@ -4549,7 +4941,7 @@
               </a:rPr>
               <a:t>Code</a:t>
             </a:r>
-            <a:endParaRPr lang="en-US" sz="2000" dirty="0" smtClean="0">
+            <a:endParaRPr lang="en-US" sz="2000" dirty="0">
               <a:latin typeface="Arial Black" charset="0"/>
               <a:ea typeface="Arial Black" charset="0"/>
               <a:cs typeface="Arial Black" charset="0"/>
@@ -4568,13 +4960,6 @@
   <p:clrMapOvr>
     <a:masterClrMapping/>
   </p:clrMapOvr>
-  <p:timing>
-    <p:tnLst>
-      <p:par>
-        <p:cTn id="1" dur="indefinite" restart="never" nodeType="tmRoot"/>
-      </p:par>
-    </p:tnLst>
-  </p:timing>
 </p:sld>
 </file>
 
@@ -4618,26 +5003,13 @@
           <a:lstStyle/>
           <a:p>
             <a:r>
-              <a:rPr lang="en-US" sz="4000" dirty="0" smtClean="0">
+              <a:rPr lang="en-US" sz="4000" dirty="0">
                 <a:latin typeface="Arial Black" charset="0"/>
                 <a:ea typeface="Arial Black" charset="0"/>
                 <a:cs typeface="Arial Black" charset="0"/>
               </a:rPr>
-              <a:t>[</a:t>
-            </a:r>
-            <a:r>
-              <a:rPr lang="en-US" sz="4000" dirty="0" smtClean="0">
-                <a:latin typeface="Arial Black" charset="0"/>
-                <a:ea typeface="Arial Black" charset="0"/>
-                <a:cs typeface="Arial Black" charset="0"/>
-              </a:rPr>
-              <a:t>2004]</a:t>
-            </a:r>
-            <a:endParaRPr lang="en-US" sz="4000" dirty="0">
-              <a:latin typeface="Arial Black" charset="0"/>
-              <a:ea typeface="Arial Black" charset="0"/>
-              <a:cs typeface="Arial Black" charset="0"/>
-            </a:endParaRPr>
+              <a:t>[2004]</a:t>
+            </a:r>
           </a:p>
         </p:txBody>
       </p:sp>
@@ -4724,26 +5096,13 @@
           <a:lstStyle/>
           <a:p>
             <a:r>
-              <a:rPr lang="en-US" sz="4000" dirty="0" smtClean="0">
+              <a:rPr lang="en-US" sz="4000" dirty="0">
                 <a:latin typeface="Arial Black" charset="0"/>
                 <a:ea typeface="Arial Black" charset="0"/>
                 <a:cs typeface="Arial Black" charset="0"/>
               </a:rPr>
-              <a:t>[</a:t>
-            </a:r>
-            <a:r>
-              <a:rPr lang="en-US" sz="4000" dirty="0" smtClean="0">
-                <a:latin typeface="Arial Black" charset="0"/>
-                <a:ea typeface="Arial Black" charset="0"/>
-                <a:cs typeface="Arial Black" charset="0"/>
-              </a:rPr>
-              <a:t>2004]</a:t>
-            </a:r>
-            <a:endParaRPr lang="en-US" sz="4000" dirty="0">
-              <a:latin typeface="Arial Black" charset="0"/>
-              <a:ea typeface="Arial Black" charset="0"/>
-              <a:cs typeface="Arial Black" charset="0"/>
-            </a:endParaRPr>
+              <a:t>[2004]</a:t>
+            </a:r>
           </a:p>
         </p:txBody>
       </p:sp>
@@ -4830,26 +5189,13 @@
           <a:lstStyle/>
           <a:p>
             <a:r>
-              <a:rPr lang="en-US" sz="4000" dirty="0" smtClean="0">
+              <a:rPr lang="en-US" sz="4000" dirty="0">
                 <a:latin typeface="Arial Black" charset="0"/>
                 <a:ea typeface="Arial Black" charset="0"/>
                 <a:cs typeface="Arial Black" charset="0"/>
               </a:rPr>
-              <a:t>[</a:t>
-            </a:r>
-            <a:r>
-              <a:rPr lang="en-US" sz="4000" dirty="0" smtClean="0">
-                <a:latin typeface="Arial Black" charset="0"/>
-                <a:ea typeface="Arial Black" charset="0"/>
-                <a:cs typeface="Arial Black" charset="0"/>
-              </a:rPr>
-              <a:t>2004]</a:t>
-            </a:r>
-            <a:endParaRPr lang="en-US" sz="4000" dirty="0">
-              <a:latin typeface="Arial Black" charset="0"/>
-              <a:ea typeface="Arial Black" charset="0"/>
-              <a:cs typeface="Arial Black" charset="0"/>
-            </a:endParaRPr>
+              <a:t>[2004]</a:t>
+            </a:r>
           </a:p>
         </p:txBody>
       </p:sp>
@@ -4915,7 +5261,13 @@
       </p:grpSpPr>
       <p:pic>
         <p:nvPicPr>
-          <p:cNvPr id="2" name="Picture 1"/>
+          <p:cNvPr id="8" name="Picture 7">
+            <a:extLst>
+              <a:ext uri="{FF2B5EF4-FFF2-40B4-BE49-F238E27FC236}">
+                <a16:creationId xmlns:a16="http://schemas.microsoft.com/office/drawing/2014/main" id="{6688CA7A-D7FC-AA48-A2EE-58A8A5DDCA2E}"/>
+              </a:ext>
+            </a:extLst>
+          </p:cNvPr>
           <p:cNvPicPr>
             <a:picLocks noChangeAspect="1"/>
           </p:cNvPicPr>
@@ -4935,68 +5287,8 @@
         </p:blipFill>
         <p:spPr>
           <a:xfrm>
-            <a:off x="3888740" y="2794000"/>
-            <a:ext cx="4140200" cy="3390900"/>
-          </a:xfrm>
-          <a:prstGeom prst="rect">
-            <a:avLst/>
-          </a:prstGeom>
-        </p:spPr>
-      </p:pic>
-      <p:pic>
-        <p:nvPicPr>
-          <p:cNvPr id="3" name="Picture 2"/>
-          <p:cNvPicPr>
-            <a:picLocks noChangeAspect="1"/>
-          </p:cNvPicPr>
-          <p:nvPr/>
-        </p:nvPicPr>
-        <p:blipFill>
-          <a:blip r:embed="rId3">
-            <a:extLst>
-              <a:ext uri="{28A0092B-C50C-407E-A947-70E740481C1C}">
-                <a14:useLocalDpi xmlns:a14="http://schemas.microsoft.com/office/drawing/2010/main" val="0"/>
-              </a:ext>
-            </a:extLst>
-          </a:blip>
-          <a:stretch>
-            <a:fillRect/>
-          </a:stretch>
-        </p:blipFill>
-        <p:spPr>
-          <a:xfrm>
             <a:off x="1852478" y="388620"/>
             <a:ext cx="8212723" cy="2019300"/>
-          </a:xfrm>
-          <a:prstGeom prst="rect">
-            <a:avLst/>
-          </a:prstGeom>
-        </p:spPr>
-      </p:pic>
-      <p:pic>
-        <p:nvPicPr>
-          <p:cNvPr id="4" name="Picture 3"/>
-          <p:cNvPicPr>
-            <a:picLocks noChangeAspect="1"/>
-          </p:cNvPicPr>
-          <p:nvPr/>
-        </p:nvPicPr>
-        <p:blipFill>
-          <a:blip r:embed="rId4">
-            <a:extLst>
-              <a:ext uri="{28A0092B-C50C-407E-A947-70E740481C1C}">
-                <a14:useLocalDpi xmlns:a14="http://schemas.microsoft.com/office/drawing/2010/main" val="0"/>
-              </a:ext>
-            </a:extLst>
-          </a:blip>
-          <a:stretch>
-            <a:fillRect/>
-          </a:stretch>
-        </p:blipFill>
-        <p:spPr>
-          <a:xfrm>
-            <a:off x="3888740" y="2682240"/>
-            <a:ext cx="4325620" cy="3502660"/>
           </a:xfrm>
           <a:prstGeom prst="rect">
             <a:avLst/>
@@ -5006,7 +5298,7 @@
     </p:spTree>
     <p:extLst>
       <p:ext uri="{BB962C8B-B14F-4D97-AF65-F5344CB8AC3E}">
-        <p14:creationId xmlns:p14="http://schemas.microsoft.com/office/powerpoint/2010/main" val="1107881835"/>
+        <p14:creationId xmlns:p14="http://schemas.microsoft.com/office/powerpoint/2010/main" val="86901118"/>
       </p:ext>
     </p:extLst>
   </p:cSld>
@@ -5042,21 +5334,44 @@
           <p:nvPr/>
         </p:nvPicPr>
         <p:blipFill>
-          <a:blip r:embed="rId2">
+          <a:blip r:embed="rId2"/>
+          <a:srcRect/>
+          <a:stretch/>
+        </p:blipFill>
+        <p:spPr>
+          <a:xfrm>
+            <a:off x="3913090" y="2794000"/>
+            <a:ext cx="4091499" cy="3390900"/>
+          </a:xfrm>
+          <a:prstGeom prst="rect">
+            <a:avLst/>
+          </a:prstGeom>
+        </p:spPr>
+      </p:pic>
+      <p:pic>
+        <p:nvPicPr>
+          <p:cNvPr id="4" name="Picture 3" descr="A close up of a logo&#10;&#10;Description automatically generated">
             <a:extLst>
-              <a:ext uri="{28A0092B-C50C-407E-A947-70E740481C1C}">
-                <a14:useLocalDpi xmlns:a14="http://schemas.microsoft.com/office/drawing/2010/main" val="0"/>
+              <a:ext uri="{FF2B5EF4-FFF2-40B4-BE49-F238E27FC236}">
+                <a16:creationId xmlns:a16="http://schemas.microsoft.com/office/drawing/2014/main" id="{A52F8928-AA7A-2540-BE54-B7428C3A08D3}"/>
               </a:ext>
             </a:extLst>
-          </a:blip>
+          </p:cNvPr>
+          <p:cNvPicPr>
+            <a:picLocks noChangeAspect="1"/>
+          </p:cNvPicPr>
+          <p:nvPr/>
+        </p:nvPicPr>
+        <p:blipFill>
+          <a:blip r:embed="rId3"/>
           <a:stretch>
             <a:fillRect/>
           </a:stretch>
         </p:blipFill>
         <p:spPr>
           <a:xfrm>
-            <a:off x="3888740" y="2794000"/>
-            <a:ext cx="4140200" cy="3390900"/>
+            <a:off x="1025610" y="3929449"/>
+            <a:ext cx="10700951" cy="2539931"/>
           </a:xfrm>
           <a:prstGeom prst="rect">
             <a:avLst/>
@@ -5065,37 +5380,13 @@
       </p:pic>
       <p:pic>
         <p:nvPicPr>
-          <p:cNvPr id="3" name="Picture 2"/>
-          <p:cNvPicPr>
-            <a:picLocks noChangeAspect="1"/>
-          </p:cNvPicPr>
-          <p:nvPr/>
-        </p:nvPicPr>
-        <p:blipFill>
-          <a:blip r:embed="rId3">
+          <p:cNvPr id="8" name="Picture 7">
             <a:extLst>
-              <a:ext uri="{28A0092B-C50C-407E-A947-70E740481C1C}">
-                <a14:useLocalDpi xmlns:a14="http://schemas.microsoft.com/office/drawing/2010/main" val="0"/>
+              <a:ext uri="{FF2B5EF4-FFF2-40B4-BE49-F238E27FC236}">
+                <a16:creationId xmlns:a16="http://schemas.microsoft.com/office/drawing/2014/main" id="{6688CA7A-D7FC-AA48-A2EE-58A8A5DDCA2E}"/>
               </a:ext>
             </a:extLst>
-          </a:blip>
-          <a:stretch>
-            <a:fillRect/>
-          </a:stretch>
-        </p:blipFill>
-        <p:spPr>
-          <a:xfrm>
-            <a:off x="1852478" y="388620"/>
-            <a:ext cx="8212723" cy="2019300"/>
-          </a:xfrm>
-          <a:prstGeom prst="rect">
-            <a:avLst/>
-          </a:prstGeom>
-        </p:spPr>
-      </p:pic>
-      <p:pic>
-        <p:nvPicPr>
-          <p:cNvPr id="4" name="Picture 3"/>
+          </p:cNvPr>
           <p:cNvPicPr>
             <a:picLocks noChangeAspect="1"/>
           </p:cNvPicPr>
@@ -5115,8 +5406,8 @@
         </p:blipFill>
         <p:spPr>
           <a:xfrm>
-            <a:off x="3888740" y="3764280"/>
-            <a:ext cx="4325620" cy="2420620"/>
+            <a:off x="1852478" y="388620"/>
+            <a:ext cx="8212723" cy="2019300"/>
           </a:xfrm>
           <a:prstGeom prst="rect">
             <a:avLst/>
@@ -5126,7 +5417,7 @@
     </p:spTree>
     <p:extLst>
       <p:ext uri="{BB962C8B-B14F-4D97-AF65-F5344CB8AC3E}">
-        <p14:creationId xmlns:p14="http://schemas.microsoft.com/office/powerpoint/2010/main" val="321463837"/>
+        <p14:creationId xmlns:p14="http://schemas.microsoft.com/office/powerpoint/2010/main" val="420603983"/>
       </p:ext>
     </p:extLst>
   </p:cSld>
@@ -5162,21 +5453,44 @@
           <p:nvPr/>
         </p:nvPicPr>
         <p:blipFill>
-          <a:blip r:embed="rId2">
+          <a:blip r:embed="rId2"/>
+          <a:srcRect/>
+          <a:stretch/>
+        </p:blipFill>
+        <p:spPr>
+          <a:xfrm>
+            <a:off x="3913090" y="2794000"/>
+            <a:ext cx="4091499" cy="3390900"/>
+          </a:xfrm>
+          <a:prstGeom prst="rect">
+            <a:avLst/>
+          </a:prstGeom>
+        </p:spPr>
+      </p:pic>
+      <p:pic>
+        <p:nvPicPr>
+          <p:cNvPr id="4" name="Picture 3" descr="A close up of a logo&#10;&#10;Description automatically generated">
             <a:extLst>
-              <a:ext uri="{28A0092B-C50C-407E-A947-70E740481C1C}">
-                <a14:useLocalDpi xmlns:a14="http://schemas.microsoft.com/office/drawing/2010/main" val="0"/>
+              <a:ext uri="{FF2B5EF4-FFF2-40B4-BE49-F238E27FC236}">
+                <a16:creationId xmlns:a16="http://schemas.microsoft.com/office/drawing/2014/main" id="{A52F8928-AA7A-2540-BE54-B7428C3A08D3}"/>
               </a:ext>
             </a:extLst>
-          </a:blip>
+          </p:cNvPr>
+          <p:cNvPicPr>
+            <a:picLocks noChangeAspect="1"/>
+          </p:cNvPicPr>
+          <p:nvPr/>
+        </p:nvPicPr>
+        <p:blipFill>
+          <a:blip r:embed="rId3"/>
           <a:stretch>
             <a:fillRect/>
           </a:stretch>
         </p:blipFill>
         <p:spPr>
           <a:xfrm>
-            <a:off x="3888740" y="2794000"/>
-            <a:ext cx="4140200" cy="3390900"/>
+            <a:off x="1025610" y="4621427"/>
+            <a:ext cx="10700951" cy="1847953"/>
           </a:xfrm>
           <a:prstGeom prst="rect">
             <a:avLst/>
@@ -5185,37 +5499,13 @@
       </p:pic>
       <p:pic>
         <p:nvPicPr>
-          <p:cNvPr id="3" name="Picture 2"/>
-          <p:cNvPicPr>
-            <a:picLocks noChangeAspect="1"/>
-          </p:cNvPicPr>
-          <p:nvPr/>
-        </p:nvPicPr>
-        <p:blipFill>
-          <a:blip r:embed="rId3">
+          <p:cNvPr id="8" name="Picture 7">
             <a:extLst>
-              <a:ext uri="{28A0092B-C50C-407E-A947-70E740481C1C}">
-                <a14:useLocalDpi xmlns:a14="http://schemas.microsoft.com/office/drawing/2010/main" val="0"/>
+              <a:ext uri="{FF2B5EF4-FFF2-40B4-BE49-F238E27FC236}">
+                <a16:creationId xmlns:a16="http://schemas.microsoft.com/office/drawing/2014/main" id="{6688CA7A-D7FC-AA48-A2EE-58A8A5DDCA2E}"/>
               </a:ext>
             </a:extLst>
-          </a:blip>
-          <a:stretch>
-            <a:fillRect/>
-          </a:stretch>
-        </p:blipFill>
-        <p:spPr>
-          <a:xfrm>
-            <a:off x="1852478" y="388620"/>
-            <a:ext cx="8212723" cy="2019300"/>
-          </a:xfrm>
-          <a:prstGeom prst="rect">
-            <a:avLst/>
-          </a:prstGeom>
-        </p:spPr>
-      </p:pic>
-      <p:pic>
-        <p:nvPicPr>
-          <p:cNvPr id="4" name="Picture 3"/>
+          </p:cNvPr>
           <p:cNvPicPr>
             <a:picLocks noChangeAspect="1"/>
           </p:cNvPicPr>
@@ -5235,8 +5525,8 @@
         </p:blipFill>
         <p:spPr>
           <a:xfrm>
-            <a:off x="3888740" y="4541520"/>
-            <a:ext cx="4325620" cy="1643380"/>
+            <a:off x="1852478" y="388620"/>
+            <a:ext cx="8212723" cy="2019300"/>
           </a:xfrm>
           <a:prstGeom prst="rect">
             <a:avLst/>
@@ -5246,7 +5536,7 @@
     </p:spTree>
     <p:extLst>
       <p:ext uri="{BB962C8B-B14F-4D97-AF65-F5344CB8AC3E}">
-        <p14:creationId xmlns:p14="http://schemas.microsoft.com/office/powerpoint/2010/main" val="1789809468"/>
+        <p14:creationId xmlns:p14="http://schemas.microsoft.com/office/powerpoint/2010/main" val="2804847675"/>
       </p:ext>
     </p:extLst>
   </p:cSld>
@@ -5282,21 +5572,44 @@
           <p:nvPr/>
         </p:nvPicPr>
         <p:blipFill>
-          <a:blip r:embed="rId2">
+          <a:blip r:embed="rId2"/>
+          <a:srcRect/>
+          <a:stretch/>
+        </p:blipFill>
+        <p:spPr>
+          <a:xfrm>
+            <a:off x="3913090" y="2794000"/>
+            <a:ext cx="4091499" cy="3390900"/>
+          </a:xfrm>
+          <a:prstGeom prst="rect">
+            <a:avLst/>
+          </a:prstGeom>
+        </p:spPr>
+      </p:pic>
+      <p:pic>
+        <p:nvPicPr>
+          <p:cNvPr id="4" name="Picture 3" descr="A close up of a logo&#10;&#10;Description automatically generated">
             <a:extLst>
-              <a:ext uri="{28A0092B-C50C-407E-A947-70E740481C1C}">
-                <a14:useLocalDpi xmlns:a14="http://schemas.microsoft.com/office/drawing/2010/main" val="0"/>
+              <a:ext uri="{FF2B5EF4-FFF2-40B4-BE49-F238E27FC236}">
+                <a16:creationId xmlns:a16="http://schemas.microsoft.com/office/drawing/2014/main" id="{A52F8928-AA7A-2540-BE54-B7428C3A08D3}"/>
               </a:ext>
             </a:extLst>
-          </a:blip>
+          </p:cNvPr>
+          <p:cNvPicPr>
+            <a:picLocks noChangeAspect="1"/>
+          </p:cNvPicPr>
+          <p:nvPr/>
+        </p:nvPicPr>
+        <p:blipFill>
+          <a:blip r:embed="rId3"/>
           <a:stretch>
             <a:fillRect/>
           </a:stretch>
         </p:blipFill>
         <p:spPr>
           <a:xfrm>
-            <a:off x="3888740" y="2794000"/>
-            <a:ext cx="4140200" cy="3390900"/>
+            <a:off x="1025610" y="4621427"/>
+            <a:ext cx="10700951" cy="1847953"/>
           </a:xfrm>
           <a:prstGeom prst="rect">
             <a:avLst/>
@@ -5305,37 +5618,13 @@
       </p:pic>
       <p:pic>
         <p:nvPicPr>
-          <p:cNvPr id="4" name="Picture 3"/>
-          <p:cNvPicPr>
-            <a:picLocks noChangeAspect="1"/>
-          </p:cNvPicPr>
-          <p:nvPr/>
-        </p:nvPicPr>
-        <p:blipFill>
-          <a:blip r:embed="rId3">
+          <p:cNvPr id="7" name="Picture 6">
             <a:extLst>
-              <a:ext uri="{28A0092B-C50C-407E-A947-70E740481C1C}">
-                <a14:useLocalDpi xmlns:a14="http://schemas.microsoft.com/office/drawing/2010/main" val="0"/>
+              <a:ext uri="{FF2B5EF4-FFF2-40B4-BE49-F238E27FC236}">
+                <a16:creationId xmlns:a16="http://schemas.microsoft.com/office/drawing/2014/main" id="{87F6C640-BCDA-8E48-AF18-DEE15B120D44}"/>
               </a:ext>
             </a:extLst>
-          </a:blip>
-          <a:stretch>
-            <a:fillRect/>
-          </a:stretch>
-        </p:blipFill>
-        <p:spPr>
-          <a:xfrm>
-            <a:off x="3888740" y="4663440"/>
-            <a:ext cx="4325620" cy="1521460"/>
-          </a:xfrm>
-          <a:prstGeom prst="rect">
-            <a:avLst/>
-          </a:prstGeom>
-        </p:spPr>
-      </p:pic>
-      <p:pic>
-        <p:nvPicPr>
-          <p:cNvPr id="5" name="Picture 4"/>
+          </p:cNvPr>
           <p:cNvPicPr>
             <a:picLocks noChangeAspect="1"/>
           </p:cNvPicPr>
@@ -5366,7 +5655,7 @@
     </p:spTree>
     <p:extLst>
       <p:ext uri="{BB962C8B-B14F-4D97-AF65-F5344CB8AC3E}">
-        <p14:creationId xmlns:p14="http://schemas.microsoft.com/office/powerpoint/2010/main" val="1428808394"/>
+        <p14:creationId xmlns:p14="http://schemas.microsoft.com/office/powerpoint/2010/main" val="2736466929"/>
       </p:ext>
     </p:extLst>
   </p:cSld>
